--- a/notes/Diagrams.pptx
+++ b/notes/Diagrams.pptx
@@ -262,7 +262,7 @@
           <a:p>
             <a:fld id="{89D22327-445B-45B6-83F5-C69A7D2AFF64}" type="datetimeFigureOut">
               <a:rPr lang="en-AU" smtClean="0"/>
-              <a:t>19/03/2026</a:t>
+              <a:t>23/03/2026</a:t>
             </a:fld>
             <a:endParaRPr lang="en-AU"/>
           </a:p>
@@ -462,7 +462,7 @@
           <a:p>
             <a:fld id="{89D22327-445B-45B6-83F5-C69A7D2AFF64}" type="datetimeFigureOut">
               <a:rPr lang="en-AU" smtClean="0"/>
-              <a:t>19/03/2026</a:t>
+              <a:t>23/03/2026</a:t>
             </a:fld>
             <a:endParaRPr lang="en-AU"/>
           </a:p>
@@ -672,7 +672,7 @@
           <a:p>
             <a:fld id="{89D22327-445B-45B6-83F5-C69A7D2AFF64}" type="datetimeFigureOut">
               <a:rPr lang="en-AU" smtClean="0"/>
-              <a:t>19/03/2026</a:t>
+              <a:t>23/03/2026</a:t>
             </a:fld>
             <a:endParaRPr lang="en-AU"/>
           </a:p>
@@ -872,7 +872,7 @@
           <a:p>
             <a:fld id="{89D22327-445B-45B6-83F5-C69A7D2AFF64}" type="datetimeFigureOut">
               <a:rPr lang="en-AU" smtClean="0"/>
-              <a:t>19/03/2026</a:t>
+              <a:t>23/03/2026</a:t>
             </a:fld>
             <a:endParaRPr lang="en-AU"/>
           </a:p>
@@ -1148,7 +1148,7 @@
           <a:p>
             <a:fld id="{89D22327-445B-45B6-83F5-C69A7D2AFF64}" type="datetimeFigureOut">
               <a:rPr lang="en-AU" smtClean="0"/>
-              <a:t>19/03/2026</a:t>
+              <a:t>23/03/2026</a:t>
             </a:fld>
             <a:endParaRPr lang="en-AU"/>
           </a:p>
@@ -1416,7 +1416,7 @@
           <a:p>
             <a:fld id="{89D22327-445B-45B6-83F5-C69A7D2AFF64}" type="datetimeFigureOut">
               <a:rPr lang="en-AU" smtClean="0"/>
-              <a:t>19/03/2026</a:t>
+              <a:t>23/03/2026</a:t>
             </a:fld>
             <a:endParaRPr lang="en-AU"/>
           </a:p>
@@ -1831,7 +1831,7 @@
           <a:p>
             <a:fld id="{89D22327-445B-45B6-83F5-C69A7D2AFF64}" type="datetimeFigureOut">
               <a:rPr lang="en-AU" smtClean="0"/>
-              <a:t>19/03/2026</a:t>
+              <a:t>23/03/2026</a:t>
             </a:fld>
             <a:endParaRPr lang="en-AU"/>
           </a:p>
@@ -1973,7 +1973,7 @@
           <a:p>
             <a:fld id="{89D22327-445B-45B6-83F5-C69A7D2AFF64}" type="datetimeFigureOut">
               <a:rPr lang="en-AU" smtClean="0"/>
-              <a:t>19/03/2026</a:t>
+              <a:t>23/03/2026</a:t>
             </a:fld>
             <a:endParaRPr lang="en-AU"/>
           </a:p>
@@ -2086,7 +2086,7 @@
           <a:p>
             <a:fld id="{89D22327-445B-45B6-83F5-C69A7D2AFF64}" type="datetimeFigureOut">
               <a:rPr lang="en-AU" smtClean="0"/>
-              <a:t>19/03/2026</a:t>
+              <a:t>23/03/2026</a:t>
             </a:fld>
             <a:endParaRPr lang="en-AU"/>
           </a:p>
@@ -2399,7 +2399,7 @@
           <a:p>
             <a:fld id="{89D22327-445B-45B6-83F5-C69A7D2AFF64}" type="datetimeFigureOut">
               <a:rPr lang="en-AU" smtClean="0"/>
-              <a:t>19/03/2026</a:t>
+              <a:t>23/03/2026</a:t>
             </a:fld>
             <a:endParaRPr lang="en-AU"/>
           </a:p>
@@ -2688,7 +2688,7 @@
           <a:p>
             <a:fld id="{89D22327-445B-45B6-83F5-C69A7D2AFF64}" type="datetimeFigureOut">
               <a:rPr lang="en-AU" smtClean="0"/>
-              <a:t>19/03/2026</a:t>
+              <a:t>23/03/2026</a:t>
             </a:fld>
             <a:endParaRPr lang="en-AU"/>
           </a:p>
@@ -2931,7 +2931,7 @@
           <a:p>
             <a:fld id="{89D22327-445B-45B6-83F5-C69A7D2AFF64}" type="datetimeFigureOut">
               <a:rPr lang="en-AU" smtClean="0"/>
-              <a:t>19/03/2026</a:t>
+              <a:t>23/03/2026</a:t>
             </a:fld>
             <a:endParaRPr lang="en-AU"/>
           </a:p>
@@ -3411,10 +3411,10 @@
         </p:nvGrpSpPr>
         <p:grpSpPr>
           <a:xfrm>
-            <a:off x="856674" y="1092200"/>
-            <a:ext cx="10432015" cy="4981788"/>
-            <a:chOff x="856674" y="1092200"/>
-            <a:chExt cx="10432015" cy="4981788"/>
+            <a:off x="820521" y="555526"/>
+            <a:ext cx="10468168" cy="5518462"/>
+            <a:chOff x="820521" y="555526"/>
+            <a:chExt cx="10468168" cy="5518462"/>
           </a:xfrm>
         </p:grpSpPr>
         <p:sp>
@@ -3521,7 +3521,7 @@
           </p:nvSpPr>
           <p:spPr>
             <a:xfrm>
-              <a:off x="3225802" y="1092200"/>
+              <a:off x="3225801" y="555526"/>
               <a:ext cx="1800000" cy="629920"/>
             </a:xfrm>
             <a:prstGeom prst="roundRect">
@@ -3756,8 +3756,8 @@
           </p:nvCxnSpPr>
           <p:spPr>
             <a:xfrm>
-              <a:off x="4125802" y="1722120"/>
-              <a:ext cx="0" cy="379307"/>
+              <a:off x="4125801" y="1185446"/>
+              <a:ext cx="1" cy="915981"/>
             </a:xfrm>
             <a:prstGeom prst="straightConnector1">
               <a:avLst/>
@@ -4073,7 +4073,7 @@
           </p:nvSpPr>
           <p:spPr>
             <a:xfrm>
-              <a:off x="2609222" y="1222494"/>
+              <a:off x="2609206" y="673001"/>
               <a:ext cx="616579" cy="369332"/>
             </a:xfrm>
             <a:prstGeom prst="rect">
@@ -4213,8 +4213,8 @@
           </p:nvSpPr>
           <p:spPr>
             <a:xfrm>
-              <a:off x="4146964" y="1757680"/>
-              <a:ext cx="936603" cy="307777"/>
+              <a:off x="4125801" y="1270113"/>
+              <a:ext cx="1468159" cy="738664"/>
             </a:xfrm>
             <a:prstGeom prst="rect">
               <a:avLst/>
@@ -4229,7 +4229,19 @@
             <a:p>
               <a:r>
                 <a:rPr lang="en-AU" sz="1400" dirty="0"/>
-                <a:t>aggregate</a:t>
+                <a:t>Treat (transform)</a:t>
+              </a:r>
+            </a:p>
+            <a:p>
+              <a:r>
+                <a:rPr lang="en-AU" sz="1400" dirty="0"/>
+                <a:t>Normalise</a:t>
+              </a:r>
+            </a:p>
+            <a:p>
+              <a:r>
+                <a:rPr lang="en-AU" sz="1400" dirty="0"/>
+                <a:t>Choose max</a:t>
               </a:r>
             </a:p>
           </p:txBody>
@@ -4249,7 +4261,7 @@
           <p:spPr>
             <a:xfrm>
               <a:off x="4146964" y="2767111"/>
-              <a:ext cx="936603" cy="307777"/>
+              <a:ext cx="949619" cy="307777"/>
             </a:xfrm>
             <a:prstGeom prst="rect">
               <a:avLst/>
@@ -4264,7 +4276,7 @@
             <a:p>
               <a:r>
                 <a:rPr lang="en-AU" sz="1400" dirty="0"/>
-                <a:t>aggregate</a:t>
+                <a:t>Aggregate</a:t>
               </a:r>
             </a:p>
           </p:txBody>
@@ -4283,8 +4295,8 @@
           </p:nvSpPr>
           <p:spPr>
             <a:xfrm>
-              <a:off x="8241450" y="4943045"/>
-              <a:ext cx="1398909" cy="307777"/>
+              <a:off x="8205160" y="4835324"/>
+              <a:ext cx="1398909" cy="523220"/>
             </a:xfrm>
             <a:prstGeom prst="rect">
               <a:avLst/>
@@ -4296,6 +4308,12 @@
               <a:spAutoFit/>
             </a:bodyPr>
             <a:lstStyle/>
+            <a:p>
+              <a:r>
+                <a:rPr lang="en-AU" sz="1400" dirty="0"/>
+                <a:t>Choose max</a:t>
+              </a:r>
+            </a:p>
             <a:p>
               <a:r>
                 <a:rPr lang="en-AU" sz="1400" dirty="0"/>
@@ -4422,7 +4440,7 @@
           <p:spPr>
             <a:xfrm>
               <a:off x="4146964" y="3777622"/>
-              <a:ext cx="936603" cy="307777"/>
+              <a:ext cx="949619" cy="307777"/>
             </a:xfrm>
             <a:prstGeom prst="rect">
               <a:avLst/>
@@ -4437,7 +4455,7 @@
             <a:p>
               <a:r>
                 <a:rPr lang="en-AU" sz="1400" dirty="0"/>
-                <a:t>aggregate</a:t>
+                <a:t>Aggregate</a:t>
               </a:r>
             </a:p>
           </p:txBody>
@@ -4456,8 +4474,8 @@
           </p:nvSpPr>
           <p:spPr>
             <a:xfrm>
-              <a:off x="2289200" y="1402080"/>
-              <a:ext cx="267298" cy="3032761"/>
+              <a:off x="2289199" y="853440"/>
+              <a:ext cx="320007" cy="3581401"/>
             </a:xfrm>
             <a:prstGeom prst="leftBrace">
               <a:avLst>
@@ -4546,7 +4564,7 @@
           </p:nvSpPr>
           <p:spPr>
             <a:xfrm>
-              <a:off x="856674" y="2601053"/>
+              <a:off x="820521" y="2320974"/>
               <a:ext cx="1526444" cy="646331"/>
             </a:xfrm>
             <a:prstGeom prst="rect">

--- a/notes/Diagrams.pptx
+++ b/notes/Diagrams.pptx
@@ -7,6 +7,7 @@
   <p:sldIdLst>
     <p:sldId id="256" r:id="rId2"/>
     <p:sldId id="257" r:id="rId3"/>
+    <p:sldId id="258" r:id="rId4"/>
   </p:sldIdLst>
   <p:sldSz cx="12192000" cy="6858000"/>
   <p:notesSz cx="6858000" cy="9144000"/>
@@ -262,7 +263,7 @@
           <a:p>
             <a:fld id="{89D22327-445B-45B6-83F5-C69A7D2AFF64}" type="datetimeFigureOut">
               <a:rPr lang="en-AU" smtClean="0"/>
-              <a:t>23/03/2026</a:t>
+              <a:t>7/04/2026</a:t>
             </a:fld>
             <a:endParaRPr lang="en-AU"/>
           </a:p>
@@ -462,7 +463,7 @@
           <a:p>
             <a:fld id="{89D22327-445B-45B6-83F5-C69A7D2AFF64}" type="datetimeFigureOut">
               <a:rPr lang="en-AU" smtClean="0"/>
-              <a:t>23/03/2026</a:t>
+              <a:t>7/04/2026</a:t>
             </a:fld>
             <a:endParaRPr lang="en-AU"/>
           </a:p>
@@ -672,7 +673,7 @@
           <a:p>
             <a:fld id="{89D22327-445B-45B6-83F5-C69A7D2AFF64}" type="datetimeFigureOut">
               <a:rPr lang="en-AU" smtClean="0"/>
-              <a:t>23/03/2026</a:t>
+              <a:t>7/04/2026</a:t>
             </a:fld>
             <a:endParaRPr lang="en-AU"/>
           </a:p>
@@ -872,7 +873,7 @@
           <a:p>
             <a:fld id="{89D22327-445B-45B6-83F5-C69A7D2AFF64}" type="datetimeFigureOut">
               <a:rPr lang="en-AU" smtClean="0"/>
-              <a:t>23/03/2026</a:t>
+              <a:t>7/04/2026</a:t>
             </a:fld>
             <a:endParaRPr lang="en-AU"/>
           </a:p>
@@ -1148,7 +1149,7 @@
           <a:p>
             <a:fld id="{89D22327-445B-45B6-83F5-C69A7D2AFF64}" type="datetimeFigureOut">
               <a:rPr lang="en-AU" smtClean="0"/>
-              <a:t>23/03/2026</a:t>
+              <a:t>7/04/2026</a:t>
             </a:fld>
             <a:endParaRPr lang="en-AU"/>
           </a:p>
@@ -1416,7 +1417,7 @@
           <a:p>
             <a:fld id="{89D22327-445B-45B6-83F5-C69A7D2AFF64}" type="datetimeFigureOut">
               <a:rPr lang="en-AU" smtClean="0"/>
-              <a:t>23/03/2026</a:t>
+              <a:t>7/04/2026</a:t>
             </a:fld>
             <a:endParaRPr lang="en-AU"/>
           </a:p>
@@ -1831,7 +1832,7 @@
           <a:p>
             <a:fld id="{89D22327-445B-45B6-83F5-C69A7D2AFF64}" type="datetimeFigureOut">
               <a:rPr lang="en-AU" smtClean="0"/>
-              <a:t>23/03/2026</a:t>
+              <a:t>7/04/2026</a:t>
             </a:fld>
             <a:endParaRPr lang="en-AU"/>
           </a:p>
@@ -1973,7 +1974,7 @@
           <a:p>
             <a:fld id="{89D22327-445B-45B6-83F5-C69A7D2AFF64}" type="datetimeFigureOut">
               <a:rPr lang="en-AU" smtClean="0"/>
-              <a:t>23/03/2026</a:t>
+              <a:t>7/04/2026</a:t>
             </a:fld>
             <a:endParaRPr lang="en-AU"/>
           </a:p>
@@ -2086,7 +2087,7 @@
           <a:p>
             <a:fld id="{89D22327-445B-45B6-83F5-C69A7D2AFF64}" type="datetimeFigureOut">
               <a:rPr lang="en-AU" smtClean="0"/>
-              <a:t>23/03/2026</a:t>
+              <a:t>7/04/2026</a:t>
             </a:fld>
             <a:endParaRPr lang="en-AU"/>
           </a:p>
@@ -2399,7 +2400,7 @@
           <a:p>
             <a:fld id="{89D22327-445B-45B6-83F5-C69A7D2AFF64}" type="datetimeFigureOut">
               <a:rPr lang="en-AU" smtClean="0"/>
-              <a:t>23/03/2026</a:t>
+              <a:t>7/04/2026</a:t>
             </a:fld>
             <a:endParaRPr lang="en-AU"/>
           </a:p>
@@ -2688,7 +2689,7 @@
           <a:p>
             <a:fld id="{89D22327-445B-45B6-83F5-C69A7D2AFF64}" type="datetimeFigureOut">
               <a:rPr lang="en-AU" smtClean="0"/>
-              <a:t>23/03/2026</a:t>
+              <a:t>7/04/2026</a:t>
             </a:fld>
             <a:endParaRPr lang="en-AU"/>
           </a:p>
@@ -2931,7 +2932,7 @@
           <a:p>
             <a:fld id="{89D22327-445B-45B6-83F5-C69A7D2AFF64}" type="datetimeFigureOut">
               <a:rPr lang="en-AU" smtClean="0"/>
-              <a:t>23/03/2026</a:t>
+              <a:t>7/04/2026</a:t>
             </a:fld>
             <a:endParaRPr lang="en-AU"/>
           </a:p>
@@ -5934,6 +5935,2315 @@
 </p:sld>
 </file>
 
+<file path=ppt/slides/slide3.xml><?xml version="1.0" encoding="utf-8"?>
+<p:sld xmlns:a="http://schemas.openxmlformats.org/drawingml/2006/main" xmlns:r="http://schemas.openxmlformats.org/officeDocument/2006/relationships" xmlns:p="http://schemas.openxmlformats.org/presentationml/2006/main">
+  <p:cSld>
+    <p:spTree>
+      <p:nvGrpSpPr>
+        <p:cNvPr id="1" name=""/>
+        <p:cNvGrpSpPr/>
+        <p:nvPr/>
+      </p:nvGrpSpPr>
+      <p:grpSpPr>
+        <a:xfrm>
+          <a:off x="0" y="0"/>
+          <a:ext cx="0" cy="0"/>
+          <a:chOff x="0" y="0"/>
+          <a:chExt cx="0" cy="0"/>
+        </a:xfrm>
+      </p:grpSpPr>
+      <p:sp>
+        <p:nvSpPr>
+          <p:cNvPr id="44" name="Rectangle 43">
+            <a:extLst>
+              <a:ext uri="{FF2B5EF4-FFF2-40B4-BE49-F238E27FC236}">
+                <a16:creationId xmlns:a16="http://schemas.microsoft.com/office/drawing/2014/main" id="{1CCEA7E3-4A95-AF3B-A0D9-FFC8E4FD6B76}"/>
+              </a:ext>
+            </a:extLst>
+          </p:cNvPr>
+          <p:cNvSpPr/>
+          <p:nvPr/>
+        </p:nvSpPr>
+        <p:spPr>
+          <a:xfrm>
+            <a:off x="2444606" y="648925"/>
+            <a:ext cx="5165561" cy="1730291"/>
+          </a:xfrm>
+          <a:prstGeom prst="rect">
+            <a:avLst/>
+          </a:prstGeom>
+          <a:solidFill>
+            <a:schemeClr val="bg1">
+              <a:lumMod val="85000"/>
+            </a:schemeClr>
+          </a:solidFill>
+          <a:ln>
+            <a:noFill/>
+          </a:ln>
+        </p:spPr>
+        <p:style>
+          <a:lnRef idx="2">
+            <a:schemeClr val="accent1">
+              <a:shade val="15000"/>
+            </a:schemeClr>
+          </a:lnRef>
+          <a:fillRef idx="1">
+            <a:schemeClr val="accent1"/>
+          </a:fillRef>
+          <a:effectRef idx="0">
+            <a:schemeClr val="accent1"/>
+          </a:effectRef>
+          <a:fontRef idx="minor">
+            <a:schemeClr val="lt1"/>
+          </a:fontRef>
+        </p:style>
+        <p:txBody>
+          <a:bodyPr rtlCol="0" anchor="ctr"/>
+          <a:lstStyle/>
+          <a:p>
+            <a:pPr algn="ctr"/>
+            <a:endParaRPr lang="en-AU"/>
+          </a:p>
+        </p:txBody>
+      </p:sp>
+      <p:sp>
+        <p:nvSpPr>
+          <p:cNvPr id="43" name="Rectangle 42">
+            <a:extLst>
+              <a:ext uri="{FF2B5EF4-FFF2-40B4-BE49-F238E27FC236}">
+                <a16:creationId xmlns:a16="http://schemas.microsoft.com/office/drawing/2014/main" id="{07B3AEB3-EF71-C9CC-BB9E-0D41170FA50A}"/>
+              </a:ext>
+            </a:extLst>
+          </p:cNvPr>
+          <p:cNvSpPr/>
+          <p:nvPr/>
+        </p:nvSpPr>
+        <p:spPr>
+          <a:xfrm>
+            <a:off x="2444606" y="4320098"/>
+            <a:ext cx="5165561" cy="1888973"/>
+          </a:xfrm>
+          <a:prstGeom prst="rect">
+            <a:avLst/>
+          </a:prstGeom>
+          <a:solidFill>
+            <a:schemeClr val="bg1">
+              <a:lumMod val="85000"/>
+            </a:schemeClr>
+          </a:solidFill>
+          <a:ln>
+            <a:noFill/>
+          </a:ln>
+        </p:spPr>
+        <p:style>
+          <a:lnRef idx="2">
+            <a:schemeClr val="accent1">
+              <a:shade val="15000"/>
+            </a:schemeClr>
+          </a:lnRef>
+          <a:fillRef idx="1">
+            <a:schemeClr val="accent1"/>
+          </a:fillRef>
+          <a:effectRef idx="0">
+            <a:schemeClr val="accent1"/>
+          </a:effectRef>
+          <a:fontRef idx="minor">
+            <a:schemeClr val="lt1"/>
+          </a:fontRef>
+        </p:style>
+        <p:txBody>
+          <a:bodyPr rtlCol="0" anchor="ctr"/>
+          <a:lstStyle/>
+          <a:p>
+            <a:pPr algn="ctr"/>
+            <a:endParaRPr lang="en-AU"/>
+          </a:p>
+        </p:txBody>
+      </p:sp>
+      <p:sp>
+        <p:nvSpPr>
+          <p:cNvPr id="40" name="Rectangle 39">
+            <a:extLst>
+              <a:ext uri="{FF2B5EF4-FFF2-40B4-BE49-F238E27FC236}">
+                <a16:creationId xmlns:a16="http://schemas.microsoft.com/office/drawing/2014/main" id="{CAAA6543-7DD0-A370-9CD7-70E1E9C97C15}"/>
+              </a:ext>
+            </a:extLst>
+          </p:cNvPr>
+          <p:cNvSpPr/>
+          <p:nvPr/>
+        </p:nvSpPr>
+        <p:spPr>
+          <a:xfrm>
+            <a:off x="2444607" y="2449414"/>
+            <a:ext cx="5165561" cy="1800486"/>
+          </a:xfrm>
+          <a:prstGeom prst="rect">
+            <a:avLst/>
+          </a:prstGeom>
+          <a:solidFill>
+            <a:schemeClr val="bg1">
+              <a:lumMod val="85000"/>
+            </a:schemeClr>
+          </a:solidFill>
+          <a:ln>
+            <a:noFill/>
+          </a:ln>
+        </p:spPr>
+        <p:style>
+          <a:lnRef idx="2">
+            <a:schemeClr val="accent1">
+              <a:shade val="15000"/>
+            </a:schemeClr>
+          </a:lnRef>
+          <a:fillRef idx="1">
+            <a:schemeClr val="accent1"/>
+          </a:fillRef>
+          <a:effectRef idx="0">
+            <a:schemeClr val="accent1"/>
+          </a:effectRef>
+          <a:fontRef idx="minor">
+            <a:schemeClr val="lt1"/>
+          </a:fontRef>
+        </p:style>
+        <p:txBody>
+          <a:bodyPr rtlCol="0" anchor="ctr"/>
+          <a:lstStyle/>
+          <a:p>
+            <a:pPr algn="ctr"/>
+            <a:endParaRPr lang="en-AU"/>
+          </a:p>
+        </p:txBody>
+      </p:sp>
+      <p:grpSp>
+        <p:nvGrpSpPr>
+          <p:cNvPr id="7" name="Group 6">
+            <a:extLst>
+              <a:ext uri="{FF2B5EF4-FFF2-40B4-BE49-F238E27FC236}">
+                <a16:creationId xmlns:a16="http://schemas.microsoft.com/office/drawing/2014/main" id="{E324AA58-3065-FA82-4E29-A55107A4300A}"/>
+              </a:ext>
+            </a:extLst>
+          </p:cNvPr>
+          <p:cNvGrpSpPr/>
+          <p:nvPr/>
+        </p:nvGrpSpPr>
+        <p:grpSpPr>
+          <a:xfrm>
+            <a:off x="2823160" y="770332"/>
+            <a:ext cx="1865670" cy="1499418"/>
+            <a:chOff x="1622323" y="2413821"/>
+            <a:chExt cx="1865670" cy="1499418"/>
+          </a:xfrm>
+        </p:grpSpPr>
+        <p:sp>
+          <p:nvSpPr>
+            <p:cNvPr id="5" name="Rectangle 4">
+              <a:extLst>
+                <a:ext uri="{FF2B5EF4-FFF2-40B4-BE49-F238E27FC236}">
+                  <a16:creationId xmlns:a16="http://schemas.microsoft.com/office/drawing/2014/main" id="{73574B72-94F3-9151-5E04-42546EC49626}"/>
+                </a:ext>
+              </a:extLst>
+            </p:cNvPr>
+            <p:cNvSpPr/>
+            <p:nvPr/>
+          </p:nvSpPr>
+          <p:spPr>
+            <a:xfrm>
+              <a:off x="1622323" y="2413821"/>
+              <a:ext cx="1865670" cy="1499418"/>
+            </a:xfrm>
+            <a:prstGeom prst="rect">
+              <a:avLst/>
+            </a:prstGeom>
+          </p:spPr>
+          <p:style>
+            <a:lnRef idx="3">
+              <a:schemeClr val="lt1"/>
+            </a:lnRef>
+            <a:fillRef idx="1">
+              <a:schemeClr val="accent3"/>
+            </a:fillRef>
+            <a:effectRef idx="1">
+              <a:schemeClr val="accent3"/>
+            </a:effectRef>
+            <a:fontRef idx="minor">
+              <a:schemeClr val="lt1"/>
+            </a:fontRef>
+          </p:style>
+          <p:txBody>
+            <a:bodyPr rtlCol="0" anchor="ctr"/>
+            <a:lstStyle/>
+            <a:p>
+              <a:pPr marL="285750" indent="-285750">
+                <a:buFontTx/>
+                <a:buChar char="-"/>
+              </a:pPr>
+              <a:endParaRPr lang="en-AU" sz="1200" dirty="0"/>
+            </a:p>
+            <a:p>
+              <a:pPr marL="285750" indent="-285750">
+                <a:buFontTx/>
+                <a:buChar char="-"/>
+              </a:pPr>
+              <a:endParaRPr lang="en-AU" sz="1200" dirty="0"/>
+            </a:p>
+            <a:p>
+              <a:pPr marL="285750" indent="-285750">
+                <a:buFontTx/>
+                <a:buChar char="-"/>
+              </a:pPr>
+              <a:r>
+                <a:rPr lang="en-AU" sz="1200" dirty="0"/>
+                <a:t>Habitat loss</a:t>
+              </a:r>
+            </a:p>
+            <a:p>
+              <a:pPr marL="285750" indent="-285750">
+                <a:buFontTx/>
+                <a:buChar char="-"/>
+              </a:pPr>
+              <a:r>
+                <a:rPr lang="en-AU" sz="1200" dirty="0"/>
+                <a:t>Invasive species</a:t>
+              </a:r>
+            </a:p>
+            <a:p>
+              <a:pPr marL="285750" indent="-285750">
+                <a:buFontTx/>
+                <a:buChar char="-"/>
+              </a:pPr>
+              <a:r>
+                <a:rPr lang="en-AU" sz="1200" dirty="0"/>
+                <a:t>Fragmentation</a:t>
+              </a:r>
+            </a:p>
+            <a:p>
+              <a:pPr marL="285750" indent="-285750">
+                <a:buFontTx/>
+                <a:buChar char="-"/>
+              </a:pPr>
+              <a:r>
+                <a:rPr lang="en-AU" sz="1200" dirty="0"/>
+                <a:t>Collision</a:t>
+              </a:r>
+            </a:p>
+          </p:txBody>
+        </p:sp>
+        <p:sp>
+          <p:nvSpPr>
+            <p:cNvPr id="6" name="Rectangle 5">
+              <a:extLst>
+                <a:ext uri="{FF2B5EF4-FFF2-40B4-BE49-F238E27FC236}">
+                  <a16:creationId xmlns:a16="http://schemas.microsoft.com/office/drawing/2014/main" id="{1C743DFA-D11C-B4B2-73D0-199960C3092A}"/>
+                </a:ext>
+              </a:extLst>
+            </p:cNvPr>
+            <p:cNvSpPr/>
+            <p:nvPr/>
+          </p:nvSpPr>
+          <p:spPr>
+            <a:xfrm>
+              <a:off x="1730476" y="2546557"/>
+              <a:ext cx="1681317" cy="285134"/>
+            </a:xfrm>
+            <a:prstGeom prst="rect">
+              <a:avLst/>
+            </a:prstGeom>
+          </p:spPr>
+          <p:style>
+            <a:lnRef idx="2">
+              <a:schemeClr val="accent3"/>
+            </a:lnRef>
+            <a:fillRef idx="1">
+              <a:schemeClr val="lt1"/>
+            </a:fillRef>
+            <a:effectRef idx="0">
+              <a:schemeClr val="accent3"/>
+            </a:effectRef>
+            <a:fontRef idx="minor">
+              <a:schemeClr val="dk1"/>
+            </a:fontRef>
+          </p:style>
+          <p:txBody>
+            <a:bodyPr rtlCol="0" anchor="ctr"/>
+            <a:lstStyle/>
+            <a:p>
+              <a:pPr algn="ctr"/>
+              <a:r>
+                <a:rPr lang="en-AU" sz="1200" dirty="0"/>
+                <a:t>Stressors</a:t>
+              </a:r>
+            </a:p>
+          </p:txBody>
+        </p:sp>
+      </p:grpSp>
+      <p:grpSp>
+        <p:nvGrpSpPr>
+          <p:cNvPr id="8" name="Group 7">
+            <a:extLst>
+              <a:ext uri="{FF2B5EF4-FFF2-40B4-BE49-F238E27FC236}">
+                <a16:creationId xmlns:a16="http://schemas.microsoft.com/office/drawing/2014/main" id="{74C0CBF2-AFD6-B356-6E66-C69ADBEAD916}"/>
+              </a:ext>
+            </a:extLst>
+          </p:cNvPr>
+          <p:cNvGrpSpPr/>
+          <p:nvPr/>
+        </p:nvGrpSpPr>
+        <p:grpSpPr>
+          <a:xfrm>
+            <a:off x="5417577" y="772672"/>
+            <a:ext cx="1865670" cy="1499418"/>
+            <a:chOff x="1622323" y="2413821"/>
+            <a:chExt cx="1865670" cy="1499418"/>
+          </a:xfrm>
+        </p:grpSpPr>
+        <p:sp>
+          <p:nvSpPr>
+            <p:cNvPr id="9" name="Rectangle 8">
+              <a:extLst>
+                <a:ext uri="{FF2B5EF4-FFF2-40B4-BE49-F238E27FC236}">
+                  <a16:creationId xmlns:a16="http://schemas.microsoft.com/office/drawing/2014/main" id="{638CA9BA-3998-AED0-66D7-F89A99125D8F}"/>
+                </a:ext>
+              </a:extLst>
+            </p:cNvPr>
+            <p:cNvSpPr/>
+            <p:nvPr/>
+          </p:nvSpPr>
+          <p:spPr>
+            <a:xfrm>
+              <a:off x="1622323" y="2413821"/>
+              <a:ext cx="1865670" cy="1499418"/>
+            </a:xfrm>
+            <a:prstGeom prst="rect">
+              <a:avLst/>
+            </a:prstGeom>
+          </p:spPr>
+          <p:style>
+            <a:lnRef idx="3">
+              <a:schemeClr val="lt1"/>
+            </a:lnRef>
+            <a:fillRef idx="1">
+              <a:schemeClr val="accent6"/>
+            </a:fillRef>
+            <a:effectRef idx="1">
+              <a:schemeClr val="accent6"/>
+            </a:effectRef>
+            <a:fontRef idx="minor">
+              <a:schemeClr val="lt1"/>
+            </a:fontRef>
+          </p:style>
+          <p:txBody>
+            <a:bodyPr rtlCol="0" anchor="ctr"/>
+            <a:lstStyle/>
+            <a:p>
+              <a:pPr marL="285750" indent="-285750">
+                <a:buFontTx/>
+                <a:buChar char="-"/>
+              </a:pPr>
+              <a:endParaRPr lang="en-AU" sz="1200" dirty="0"/>
+            </a:p>
+            <a:p>
+              <a:pPr marL="285750" indent="-285750">
+                <a:buFontTx/>
+                <a:buChar char="-"/>
+              </a:pPr>
+              <a:endParaRPr lang="en-AU" sz="1200" dirty="0"/>
+            </a:p>
+            <a:p>
+              <a:pPr marL="285750" indent="-285750">
+                <a:buFontTx/>
+                <a:buChar char="-"/>
+              </a:pPr>
+              <a:r>
+                <a:rPr lang="en-AU" sz="1200" dirty="0"/>
+                <a:t>Growth form</a:t>
+              </a:r>
+            </a:p>
+            <a:p>
+              <a:pPr marL="285750" indent="-285750">
+                <a:buFontTx/>
+                <a:buChar char="-"/>
+              </a:pPr>
+              <a:r>
+                <a:rPr lang="en-AU" sz="1200" dirty="0"/>
+                <a:t>Breeding habitat</a:t>
+              </a:r>
+            </a:p>
+            <a:p>
+              <a:pPr marL="285750" indent="-285750">
+                <a:buFontTx/>
+                <a:buChar char="-"/>
+              </a:pPr>
+              <a:r>
+                <a:rPr lang="en-AU" sz="1200" dirty="0"/>
+                <a:t>Hand-wing index</a:t>
+              </a:r>
+            </a:p>
+            <a:p>
+              <a:pPr marL="285750" indent="-285750">
+                <a:buFontTx/>
+                <a:buChar char="-"/>
+              </a:pPr>
+              <a:r>
+                <a:rPr lang="en-AU" sz="1200" dirty="0"/>
+                <a:t>Foraging strategy</a:t>
+              </a:r>
+            </a:p>
+          </p:txBody>
+        </p:sp>
+        <p:sp>
+          <p:nvSpPr>
+            <p:cNvPr id="10" name="Rectangle 9">
+              <a:extLst>
+                <a:ext uri="{FF2B5EF4-FFF2-40B4-BE49-F238E27FC236}">
+                  <a16:creationId xmlns:a16="http://schemas.microsoft.com/office/drawing/2014/main" id="{B28A8D8D-E493-73D1-EA50-1D0EB6E52321}"/>
+                </a:ext>
+              </a:extLst>
+            </p:cNvPr>
+            <p:cNvSpPr/>
+            <p:nvPr/>
+          </p:nvSpPr>
+          <p:spPr>
+            <a:xfrm>
+              <a:off x="1730476" y="2546557"/>
+              <a:ext cx="1681317" cy="285134"/>
+            </a:xfrm>
+            <a:prstGeom prst="rect">
+              <a:avLst/>
+            </a:prstGeom>
+          </p:spPr>
+          <p:style>
+            <a:lnRef idx="2">
+              <a:schemeClr val="accent3"/>
+            </a:lnRef>
+            <a:fillRef idx="1">
+              <a:schemeClr val="lt1"/>
+            </a:fillRef>
+            <a:effectRef idx="0">
+              <a:schemeClr val="accent3"/>
+            </a:effectRef>
+            <a:fontRef idx="minor">
+              <a:schemeClr val="dk1"/>
+            </a:fontRef>
+          </p:style>
+          <p:txBody>
+            <a:bodyPr rtlCol="0" anchor="ctr"/>
+            <a:lstStyle/>
+            <a:p>
+              <a:pPr algn="ctr"/>
+              <a:r>
+                <a:rPr lang="en-AU" sz="1200" dirty="0"/>
+                <a:t>Traits</a:t>
+              </a:r>
+            </a:p>
+          </p:txBody>
+        </p:sp>
+      </p:grpSp>
+      <p:graphicFrame>
+        <p:nvGraphicFramePr>
+          <p:cNvPr id="11" name="Table 10">
+            <a:extLst>
+              <a:ext uri="{FF2B5EF4-FFF2-40B4-BE49-F238E27FC236}">
+                <a16:creationId xmlns:a16="http://schemas.microsoft.com/office/drawing/2014/main" id="{B4EA1251-A59F-BFE1-5880-3E11509FB1EC}"/>
+              </a:ext>
+            </a:extLst>
+          </p:cNvPr>
+          <p:cNvGraphicFramePr>
+            <a:graphicFrameLocks noGrp="1"/>
+          </p:cNvGraphicFramePr>
+          <p:nvPr>
+            <p:extLst>
+              <p:ext uri="{D42A27DB-BD31-4B8C-83A1-F6EECF244321}">
+                <p14:modId xmlns:p14="http://schemas.microsoft.com/office/powerpoint/2010/main" val="1522494354"/>
+              </p:ext>
+            </p:extLst>
+          </p:nvPr>
+        </p:nvGraphicFramePr>
+        <p:xfrm>
+          <a:off x="5634900" y="2762922"/>
+          <a:ext cx="1584000" cy="1424583"/>
+        </p:xfrm>
+        <a:graphic>
+          <a:graphicData uri="http://schemas.openxmlformats.org/drawingml/2006/table">
+            <a:tbl>
+              <a:tblPr firstRow="1" bandRow="1">
+                <a:tableStyleId>{93296810-A885-4BE3-A3E7-6D5BEEA58F35}</a:tableStyleId>
+              </a:tblPr>
+              <a:tblGrid>
+                <a:gridCol w="262962">
+                  <a:extLst>
+                    <a:ext uri="{9D8B030D-6E8A-4147-A177-3AD203B41FA5}">
+                      <a16:colId xmlns:a16="http://schemas.microsoft.com/office/drawing/2014/main" val="3371057381"/>
+                    </a:ext>
+                  </a:extLst>
+                </a:gridCol>
+                <a:gridCol w="440346">
+                  <a:extLst>
+                    <a:ext uri="{9D8B030D-6E8A-4147-A177-3AD203B41FA5}">
+                      <a16:colId xmlns:a16="http://schemas.microsoft.com/office/drawing/2014/main" val="1907105386"/>
+                    </a:ext>
+                  </a:extLst>
+                </a:gridCol>
+                <a:gridCol w="440346">
+                  <a:extLst>
+                    <a:ext uri="{9D8B030D-6E8A-4147-A177-3AD203B41FA5}">
+                      <a16:colId xmlns:a16="http://schemas.microsoft.com/office/drawing/2014/main" val="2752765291"/>
+                    </a:ext>
+                  </a:extLst>
+                </a:gridCol>
+                <a:gridCol w="440346">
+                  <a:extLst>
+                    <a:ext uri="{9D8B030D-6E8A-4147-A177-3AD203B41FA5}">
+                      <a16:colId xmlns:a16="http://schemas.microsoft.com/office/drawing/2014/main" val="2927904193"/>
+                    </a:ext>
+                  </a:extLst>
+                </a:gridCol>
+              </a:tblGrid>
+              <a:tr h="296854">
+                <a:tc>
+                  <a:txBody>
+                    <a:bodyPr/>
+                    <a:lstStyle/>
+                    <a:p>
+                      <a:pPr algn="ctr"/>
+                      <a:endParaRPr lang="en-AU" sz="1400" dirty="0"/>
+                    </a:p>
+                  </a:txBody>
+                  <a:tcPr/>
+                </a:tc>
+                <a:tc>
+                  <a:txBody>
+                    <a:bodyPr/>
+                    <a:lstStyle/>
+                    <a:p>
+                      <a:pPr algn="ctr"/>
+                      <a:r>
+                        <a:rPr lang="en-AU" sz="1400" dirty="0"/>
+                        <a:t>A</a:t>
+                      </a:r>
+                    </a:p>
+                  </a:txBody>
+                  <a:tcPr/>
+                </a:tc>
+                <a:tc>
+                  <a:txBody>
+                    <a:bodyPr/>
+                    <a:lstStyle/>
+                    <a:p>
+                      <a:pPr algn="ctr"/>
+                      <a:r>
+                        <a:rPr lang="en-AU" sz="1400" dirty="0"/>
+                        <a:t>B</a:t>
+                      </a:r>
+                    </a:p>
+                  </a:txBody>
+                  <a:tcPr/>
+                </a:tc>
+                <a:tc>
+                  <a:txBody>
+                    <a:bodyPr/>
+                    <a:lstStyle/>
+                    <a:p>
+                      <a:pPr algn="ctr"/>
+                      <a:r>
+                        <a:rPr lang="en-AU" sz="1400" dirty="0"/>
+                        <a:t>C</a:t>
+                      </a:r>
+                    </a:p>
+                  </a:txBody>
+                  <a:tcPr/>
+                </a:tc>
+                <a:extLst>
+                  <a:ext uri="{0D108BD9-81ED-4DB2-BD59-A6C34878D82A}">
+                    <a16:rowId xmlns:a16="http://schemas.microsoft.com/office/drawing/2014/main" val="4058072949"/>
+                  </a:ext>
+                </a:extLst>
+              </a:tr>
+              <a:tr h="373261">
+                <a:tc>
+                  <a:txBody>
+                    <a:bodyPr/>
+                    <a:lstStyle/>
+                    <a:p>
+                      <a:pPr algn="ctr"/>
+                      <a:r>
+                        <a:rPr lang="en-AU" sz="1400" dirty="0">
+                          <a:solidFill>
+                            <a:schemeClr val="bg1"/>
+                          </a:solidFill>
+                        </a:rPr>
+                        <a:t>1</a:t>
+                      </a:r>
+                    </a:p>
+                  </a:txBody>
+                  <a:tcPr>
+                    <a:solidFill>
+                      <a:schemeClr val="accent6"/>
+                    </a:solidFill>
+                  </a:tcPr>
+                </a:tc>
+                <a:tc>
+                  <a:txBody>
+                    <a:bodyPr/>
+                    <a:lstStyle/>
+                    <a:p>
+                      <a:pPr algn="ctr"/>
+                      <a:r>
+                        <a:rPr lang="en-AU" sz="1400" dirty="0"/>
+                        <a:t>1</a:t>
+                      </a:r>
+                    </a:p>
+                  </a:txBody>
+                  <a:tcPr/>
+                </a:tc>
+                <a:tc>
+                  <a:txBody>
+                    <a:bodyPr/>
+                    <a:lstStyle/>
+                    <a:p>
+                      <a:pPr algn="ctr"/>
+                      <a:r>
+                        <a:rPr lang="en-AU" sz="1400" dirty="0"/>
+                        <a:t>0</a:t>
+                      </a:r>
+                    </a:p>
+                  </a:txBody>
+                  <a:tcPr/>
+                </a:tc>
+                <a:tc>
+                  <a:txBody>
+                    <a:bodyPr/>
+                    <a:lstStyle/>
+                    <a:p>
+                      <a:pPr algn="ctr"/>
+                      <a:r>
+                        <a:rPr lang="en-AU" sz="1400" dirty="0"/>
+                        <a:t>1</a:t>
+                      </a:r>
+                    </a:p>
+                  </a:txBody>
+                  <a:tcPr/>
+                </a:tc>
+                <a:extLst>
+                  <a:ext uri="{0D108BD9-81ED-4DB2-BD59-A6C34878D82A}">
+                    <a16:rowId xmlns:a16="http://schemas.microsoft.com/office/drawing/2014/main" val="181400494"/>
+                  </a:ext>
+                </a:extLst>
+              </a:tr>
+              <a:tr h="373261">
+                <a:tc>
+                  <a:txBody>
+                    <a:bodyPr/>
+                    <a:lstStyle/>
+                    <a:p>
+                      <a:pPr algn="ctr"/>
+                      <a:r>
+                        <a:rPr lang="en-AU" sz="1400" dirty="0">
+                          <a:solidFill>
+                            <a:schemeClr val="bg1"/>
+                          </a:solidFill>
+                        </a:rPr>
+                        <a:t>2</a:t>
+                      </a:r>
+                    </a:p>
+                  </a:txBody>
+                  <a:tcPr>
+                    <a:solidFill>
+                      <a:schemeClr val="accent6"/>
+                    </a:solidFill>
+                  </a:tcPr>
+                </a:tc>
+                <a:tc>
+                  <a:txBody>
+                    <a:bodyPr/>
+                    <a:lstStyle/>
+                    <a:p>
+                      <a:pPr algn="ctr"/>
+                      <a:r>
+                        <a:rPr lang="en-AU" sz="1400" dirty="0"/>
+                        <a:t>0.3</a:t>
+                      </a:r>
+                    </a:p>
+                  </a:txBody>
+                  <a:tcPr/>
+                </a:tc>
+                <a:tc>
+                  <a:txBody>
+                    <a:bodyPr/>
+                    <a:lstStyle/>
+                    <a:p>
+                      <a:pPr algn="ctr"/>
+                      <a:r>
+                        <a:rPr lang="en-AU" sz="1400" dirty="0"/>
+                        <a:t>0.6</a:t>
+                      </a:r>
+                    </a:p>
+                  </a:txBody>
+                  <a:tcPr/>
+                </a:tc>
+                <a:tc>
+                  <a:txBody>
+                    <a:bodyPr/>
+                    <a:lstStyle/>
+                    <a:p>
+                      <a:pPr algn="ctr"/>
+                      <a:r>
+                        <a:rPr lang="en-AU" sz="1400" dirty="0"/>
+                        <a:t>0.2</a:t>
+                      </a:r>
+                    </a:p>
+                  </a:txBody>
+                  <a:tcPr/>
+                </a:tc>
+                <a:extLst>
+                  <a:ext uri="{0D108BD9-81ED-4DB2-BD59-A6C34878D82A}">
+                    <a16:rowId xmlns:a16="http://schemas.microsoft.com/office/drawing/2014/main" val="3219765604"/>
+                  </a:ext>
+                </a:extLst>
+              </a:tr>
+              <a:tr h="373261">
+                <a:tc>
+                  <a:txBody>
+                    <a:bodyPr/>
+                    <a:lstStyle/>
+                    <a:p>
+                      <a:pPr algn="ctr"/>
+                      <a:r>
+                        <a:rPr lang="en-AU" sz="1400" dirty="0">
+                          <a:solidFill>
+                            <a:schemeClr val="bg1"/>
+                          </a:solidFill>
+                        </a:rPr>
+                        <a:t>3</a:t>
+                      </a:r>
+                    </a:p>
+                  </a:txBody>
+                  <a:tcPr>
+                    <a:solidFill>
+                      <a:schemeClr val="accent6"/>
+                    </a:solidFill>
+                  </a:tcPr>
+                </a:tc>
+                <a:tc>
+                  <a:txBody>
+                    <a:bodyPr/>
+                    <a:lstStyle/>
+                    <a:p>
+                      <a:pPr algn="ctr"/>
+                      <a:r>
+                        <a:rPr lang="en-AU" sz="1400" dirty="0"/>
+                        <a:t>0</a:t>
+                      </a:r>
+                    </a:p>
+                  </a:txBody>
+                  <a:tcPr/>
+                </a:tc>
+                <a:tc>
+                  <a:txBody>
+                    <a:bodyPr/>
+                    <a:lstStyle/>
+                    <a:p>
+                      <a:pPr algn="ctr"/>
+                      <a:r>
+                        <a:rPr lang="en-AU" sz="1400" dirty="0"/>
+                        <a:t>1</a:t>
+                      </a:r>
+                    </a:p>
+                  </a:txBody>
+                  <a:tcPr/>
+                </a:tc>
+                <a:tc>
+                  <a:txBody>
+                    <a:bodyPr/>
+                    <a:lstStyle/>
+                    <a:p>
+                      <a:pPr algn="ctr"/>
+                      <a:r>
+                        <a:rPr lang="en-AU" sz="1400" dirty="0"/>
+                        <a:t>NA</a:t>
+                      </a:r>
+                    </a:p>
+                  </a:txBody>
+                  <a:tcPr/>
+                </a:tc>
+                <a:extLst>
+                  <a:ext uri="{0D108BD9-81ED-4DB2-BD59-A6C34878D82A}">
+                    <a16:rowId xmlns:a16="http://schemas.microsoft.com/office/drawing/2014/main" val="2371759891"/>
+                  </a:ext>
+                </a:extLst>
+              </a:tr>
+            </a:tbl>
+          </a:graphicData>
+        </a:graphic>
+      </p:graphicFrame>
+      <p:sp>
+        <p:nvSpPr>
+          <p:cNvPr id="12" name="TextBox 11">
+            <a:extLst>
+              <a:ext uri="{FF2B5EF4-FFF2-40B4-BE49-F238E27FC236}">
+                <a16:creationId xmlns:a16="http://schemas.microsoft.com/office/drawing/2014/main" id="{9E86C549-F0FD-4C99-0970-C2C3747950C0}"/>
+              </a:ext>
+            </a:extLst>
+          </p:cNvPr>
+          <p:cNvSpPr txBox="1"/>
+          <p:nvPr/>
+        </p:nvSpPr>
+        <p:spPr>
+          <a:xfrm>
+            <a:off x="5922889" y="2455143"/>
+            <a:ext cx="785793" cy="307777"/>
+          </a:xfrm>
+          <a:prstGeom prst="rect">
+            <a:avLst/>
+          </a:prstGeom>
+          <a:noFill/>
+        </p:spPr>
+        <p:txBody>
+          <a:bodyPr wrap="none" rtlCol="0">
+            <a:spAutoFit/>
+          </a:bodyPr>
+          <a:lstStyle/>
+          <a:p>
+            <a:r>
+              <a:rPr lang="en-AU" sz="1400" dirty="0"/>
+              <a:t>species</a:t>
+            </a:r>
+          </a:p>
+        </p:txBody>
+      </p:sp>
+      <p:sp>
+        <p:nvSpPr>
+          <p:cNvPr id="13" name="TextBox 12">
+            <a:extLst>
+              <a:ext uri="{FF2B5EF4-FFF2-40B4-BE49-F238E27FC236}">
+                <a16:creationId xmlns:a16="http://schemas.microsoft.com/office/drawing/2014/main" id="{FCD934E4-FF69-7664-9B84-B5246EC3847F}"/>
+              </a:ext>
+            </a:extLst>
+          </p:cNvPr>
+          <p:cNvSpPr txBox="1"/>
+          <p:nvPr/>
+        </p:nvSpPr>
+        <p:spPr>
+          <a:xfrm>
+            <a:off x="5108875" y="3218632"/>
+            <a:ext cx="493533" cy="307777"/>
+          </a:xfrm>
+          <a:prstGeom prst="rect">
+            <a:avLst/>
+          </a:prstGeom>
+          <a:noFill/>
+        </p:spPr>
+        <p:txBody>
+          <a:bodyPr wrap="none" rtlCol="0">
+            <a:spAutoFit/>
+          </a:bodyPr>
+          <a:lstStyle/>
+          <a:p>
+            <a:r>
+              <a:rPr lang="en-AU" sz="1400" dirty="0"/>
+              <a:t>trait</a:t>
+            </a:r>
+          </a:p>
+        </p:txBody>
+      </p:sp>
+      <p:graphicFrame>
+        <p:nvGraphicFramePr>
+          <p:cNvPr id="14" name="Table 13">
+            <a:extLst>
+              <a:ext uri="{FF2B5EF4-FFF2-40B4-BE49-F238E27FC236}">
+                <a16:creationId xmlns:a16="http://schemas.microsoft.com/office/drawing/2014/main" id="{8302DB75-BD70-FACC-166E-C57898F3F6C1}"/>
+              </a:ext>
+            </a:extLst>
+          </p:cNvPr>
+          <p:cNvGraphicFramePr>
+            <a:graphicFrameLocks noGrp="1"/>
+          </p:cNvGraphicFramePr>
+          <p:nvPr>
+            <p:extLst>
+              <p:ext uri="{D42A27DB-BD31-4B8C-83A1-F6EECF244321}">
+                <p14:modId xmlns:p14="http://schemas.microsoft.com/office/powerpoint/2010/main" val="2055273876"/>
+              </p:ext>
+            </p:extLst>
+          </p:nvPr>
+        </p:nvGraphicFramePr>
+        <p:xfrm>
+          <a:off x="2993054" y="2762922"/>
+          <a:ext cx="1584000" cy="1424583"/>
+        </p:xfrm>
+        <a:graphic>
+          <a:graphicData uri="http://schemas.openxmlformats.org/drawingml/2006/table">
+            <a:tbl>
+              <a:tblPr firstRow="1" bandRow="1">
+                <a:tableStyleId>{F5AB1C69-6EDB-4FF4-983F-18BD219EF322}</a:tableStyleId>
+              </a:tblPr>
+              <a:tblGrid>
+                <a:gridCol w="262962">
+                  <a:extLst>
+                    <a:ext uri="{9D8B030D-6E8A-4147-A177-3AD203B41FA5}">
+                      <a16:colId xmlns:a16="http://schemas.microsoft.com/office/drawing/2014/main" val="3371057381"/>
+                    </a:ext>
+                  </a:extLst>
+                </a:gridCol>
+                <a:gridCol w="440346">
+                  <a:extLst>
+                    <a:ext uri="{9D8B030D-6E8A-4147-A177-3AD203B41FA5}">
+                      <a16:colId xmlns:a16="http://schemas.microsoft.com/office/drawing/2014/main" val="1907105386"/>
+                    </a:ext>
+                  </a:extLst>
+                </a:gridCol>
+                <a:gridCol w="440346">
+                  <a:extLst>
+                    <a:ext uri="{9D8B030D-6E8A-4147-A177-3AD203B41FA5}">
+                      <a16:colId xmlns:a16="http://schemas.microsoft.com/office/drawing/2014/main" val="2752765291"/>
+                    </a:ext>
+                  </a:extLst>
+                </a:gridCol>
+                <a:gridCol w="440346">
+                  <a:extLst>
+                    <a:ext uri="{9D8B030D-6E8A-4147-A177-3AD203B41FA5}">
+                      <a16:colId xmlns:a16="http://schemas.microsoft.com/office/drawing/2014/main" val="2927904193"/>
+                    </a:ext>
+                  </a:extLst>
+                </a:gridCol>
+              </a:tblGrid>
+              <a:tr h="296854">
+                <a:tc>
+                  <a:txBody>
+                    <a:bodyPr/>
+                    <a:lstStyle/>
+                    <a:p>
+                      <a:pPr algn="ctr"/>
+                      <a:endParaRPr lang="en-AU" sz="1400" dirty="0"/>
+                    </a:p>
+                  </a:txBody>
+                  <a:tcPr>
+                    <a:solidFill>
+                      <a:schemeClr val="accent3"/>
+                    </a:solidFill>
+                  </a:tcPr>
+                </a:tc>
+                <a:tc>
+                  <a:txBody>
+                    <a:bodyPr/>
+                    <a:lstStyle/>
+                    <a:p>
+                      <a:pPr algn="ctr"/>
+                      <a:r>
+                        <a:rPr lang="en-AU" sz="1400" dirty="0"/>
+                        <a:t>a</a:t>
+                      </a:r>
+                    </a:p>
+                  </a:txBody>
+                  <a:tcPr/>
+                </a:tc>
+                <a:tc>
+                  <a:txBody>
+                    <a:bodyPr/>
+                    <a:lstStyle/>
+                    <a:p>
+                      <a:pPr algn="ctr"/>
+                      <a:r>
+                        <a:rPr lang="en-AU" sz="1400" dirty="0"/>
+                        <a:t>b</a:t>
+                      </a:r>
+                    </a:p>
+                  </a:txBody>
+                  <a:tcPr/>
+                </a:tc>
+                <a:tc>
+                  <a:txBody>
+                    <a:bodyPr/>
+                    <a:lstStyle/>
+                    <a:p>
+                      <a:pPr algn="ctr"/>
+                      <a:r>
+                        <a:rPr lang="en-AU" sz="1400" dirty="0"/>
+                        <a:t>c</a:t>
+                      </a:r>
+                    </a:p>
+                  </a:txBody>
+                  <a:tcPr/>
+                </a:tc>
+                <a:extLst>
+                  <a:ext uri="{0D108BD9-81ED-4DB2-BD59-A6C34878D82A}">
+                    <a16:rowId xmlns:a16="http://schemas.microsoft.com/office/drawing/2014/main" val="4058072949"/>
+                  </a:ext>
+                </a:extLst>
+              </a:tr>
+              <a:tr h="373261">
+                <a:tc>
+                  <a:txBody>
+                    <a:bodyPr/>
+                    <a:lstStyle/>
+                    <a:p>
+                      <a:pPr algn="ctr"/>
+                      <a:r>
+                        <a:rPr lang="en-AU" sz="1400" dirty="0">
+                          <a:solidFill>
+                            <a:schemeClr val="bg1"/>
+                          </a:solidFill>
+                        </a:rPr>
+                        <a:t>1</a:t>
+                      </a:r>
+                    </a:p>
+                  </a:txBody>
+                  <a:tcPr>
+                    <a:solidFill>
+                      <a:schemeClr val="accent3"/>
+                    </a:solidFill>
+                  </a:tcPr>
+                </a:tc>
+                <a:tc>
+                  <a:txBody>
+                    <a:bodyPr/>
+                    <a:lstStyle/>
+                    <a:p>
+                      <a:pPr algn="ctr"/>
+                      <a:r>
+                        <a:rPr lang="en-AU" sz="1400" dirty="0"/>
+                        <a:t>3</a:t>
+                      </a:r>
+                    </a:p>
+                  </a:txBody>
+                  <a:tcPr/>
+                </a:tc>
+                <a:tc>
+                  <a:txBody>
+                    <a:bodyPr/>
+                    <a:lstStyle/>
+                    <a:p>
+                      <a:pPr algn="ctr"/>
+                      <a:r>
+                        <a:rPr lang="en-AU" sz="1400" dirty="0"/>
+                        <a:t>1</a:t>
+                      </a:r>
+                    </a:p>
+                  </a:txBody>
+                  <a:tcPr/>
+                </a:tc>
+                <a:tc>
+                  <a:txBody>
+                    <a:bodyPr/>
+                    <a:lstStyle/>
+                    <a:p>
+                      <a:pPr algn="ctr"/>
+                      <a:r>
+                        <a:rPr lang="en-AU" sz="1400" dirty="0"/>
+                        <a:t>2</a:t>
+                      </a:r>
+                    </a:p>
+                  </a:txBody>
+                  <a:tcPr/>
+                </a:tc>
+                <a:extLst>
+                  <a:ext uri="{0D108BD9-81ED-4DB2-BD59-A6C34878D82A}">
+                    <a16:rowId xmlns:a16="http://schemas.microsoft.com/office/drawing/2014/main" val="181400494"/>
+                  </a:ext>
+                </a:extLst>
+              </a:tr>
+              <a:tr h="373261">
+                <a:tc>
+                  <a:txBody>
+                    <a:bodyPr/>
+                    <a:lstStyle/>
+                    <a:p>
+                      <a:pPr algn="ctr"/>
+                      <a:r>
+                        <a:rPr lang="en-AU" sz="1400" dirty="0">
+                          <a:solidFill>
+                            <a:schemeClr val="bg1"/>
+                          </a:solidFill>
+                        </a:rPr>
+                        <a:t>2</a:t>
+                      </a:r>
+                    </a:p>
+                  </a:txBody>
+                  <a:tcPr>
+                    <a:solidFill>
+                      <a:schemeClr val="accent3"/>
+                    </a:solidFill>
+                  </a:tcPr>
+                </a:tc>
+                <a:tc>
+                  <a:txBody>
+                    <a:bodyPr/>
+                    <a:lstStyle/>
+                    <a:p>
+                      <a:pPr algn="ctr"/>
+                      <a:r>
+                        <a:rPr lang="en-AU" sz="1400" dirty="0"/>
+                        <a:t>NA</a:t>
+                      </a:r>
+                    </a:p>
+                  </a:txBody>
+                  <a:tcPr/>
+                </a:tc>
+                <a:tc>
+                  <a:txBody>
+                    <a:bodyPr/>
+                    <a:lstStyle/>
+                    <a:p>
+                      <a:pPr algn="ctr"/>
+                      <a:r>
+                        <a:rPr lang="en-AU" sz="1400" dirty="0"/>
+                        <a:t>NA</a:t>
+                      </a:r>
+                    </a:p>
+                  </a:txBody>
+                  <a:tcPr/>
+                </a:tc>
+                <a:tc>
+                  <a:txBody>
+                    <a:bodyPr/>
+                    <a:lstStyle/>
+                    <a:p>
+                      <a:pPr algn="ctr"/>
+                      <a:r>
+                        <a:rPr lang="en-AU" sz="1400" dirty="0"/>
+                        <a:t>1</a:t>
+                      </a:r>
+                    </a:p>
+                  </a:txBody>
+                  <a:tcPr/>
+                </a:tc>
+                <a:extLst>
+                  <a:ext uri="{0D108BD9-81ED-4DB2-BD59-A6C34878D82A}">
+                    <a16:rowId xmlns:a16="http://schemas.microsoft.com/office/drawing/2014/main" val="3219765604"/>
+                  </a:ext>
+                </a:extLst>
+              </a:tr>
+              <a:tr h="373261">
+                <a:tc>
+                  <a:txBody>
+                    <a:bodyPr/>
+                    <a:lstStyle/>
+                    <a:p>
+                      <a:pPr algn="ctr"/>
+                      <a:r>
+                        <a:rPr lang="en-AU" sz="1400" dirty="0">
+                          <a:solidFill>
+                            <a:schemeClr val="bg1"/>
+                          </a:solidFill>
+                        </a:rPr>
+                        <a:t>3</a:t>
+                      </a:r>
+                    </a:p>
+                  </a:txBody>
+                  <a:tcPr>
+                    <a:solidFill>
+                      <a:schemeClr val="accent3"/>
+                    </a:solidFill>
+                  </a:tcPr>
+                </a:tc>
+                <a:tc>
+                  <a:txBody>
+                    <a:bodyPr/>
+                    <a:lstStyle/>
+                    <a:p>
+                      <a:pPr algn="ctr"/>
+                      <a:r>
+                        <a:rPr lang="en-AU" sz="1400" dirty="0"/>
+                        <a:t>1</a:t>
+                      </a:r>
+                    </a:p>
+                  </a:txBody>
+                  <a:tcPr/>
+                </a:tc>
+                <a:tc>
+                  <a:txBody>
+                    <a:bodyPr/>
+                    <a:lstStyle/>
+                    <a:p>
+                      <a:pPr algn="ctr"/>
+                      <a:r>
+                        <a:rPr lang="en-AU" sz="1400" dirty="0"/>
+                        <a:t>3</a:t>
+                      </a:r>
+                    </a:p>
+                  </a:txBody>
+                  <a:tcPr/>
+                </a:tc>
+                <a:tc>
+                  <a:txBody>
+                    <a:bodyPr/>
+                    <a:lstStyle/>
+                    <a:p>
+                      <a:pPr algn="ctr"/>
+                      <a:r>
+                        <a:rPr lang="en-AU" sz="1400" dirty="0"/>
+                        <a:t>2</a:t>
+                      </a:r>
+                    </a:p>
+                  </a:txBody>
+                  <a:tcPr/>
+                </a:tc>
+                <a:extLst>
+                  <a:ext uri="{0D108BD9-81ED-4DB2-BD59-A6C34878D82A}">
+                    <a16:rowId xmlns:a16="http://schemas.microsoft.com/office/drawing/2014/main" val="2371759891"/>
+                  </a:ext>
+                </a:extLst>
+              </a:tr>
+            </a:tbl>
+          </a:graphicData>
+        </a:graphic>
+      </p:graphicFrame>
+      <p:sp>
+        <p:nvSpPr>
+          <p:cNvPr id="15" name="TextBox 14">
+            <a:extLst>
+              <a:ext uri="{FF2B5EF4-FFF2-40B4-BE49-F238E27FC236}">
+                <a16:creationId xmlns:a16="http://schemas.microsoft.com/office/drawing/2014/main" id="{6C0E797D-BB61-C852-5D15-60C891AE0978}"/>
+              </a:ext>
+            </a:extLst>
+          </p:cNvPr>
+          <p:cNvSpPr txBox="1"/>
+          <p:nvPr/>
+        </p:nvSpPr>
+        <p:spPr>
+          <a:xfrm>
+            <a:off x="3281043" y="2455143"/>
+            <a:ext cx="811184" cy="307777"/>
+          </a:xfrm>
+          <a:prstGeom prst="rect">
+            <a:avLst/>
+          </a:prstGeom>
+          <a:noFill/>
+        </p:spPr>
+        <p:txBody>
+          <a:bodyPr wrap="none" rtlCol="0">
+            <a:spAutoFit/>
+          </a:bodyPr>
+          <a:lstStyle/>
+          <a:p>
+            <a:r>
+              <a:rPr lang="en-AU" sz="1400" dirty="0"/>
+              <a:t>stressor</a:t>
+            </a:r>
+          </a:p>
+        </p:txBody>
+      </p:sp>
+      <p:sp>
+        <p:nvSpPr>
+          <p:cNvPr id="16" name="TextBox 15">
+            <a:extLst>
+              <a:ext uri="{FF2B5EF4-FFF2-40B4-BE49-F238E27FC236}">
+                <a16:creationId xmlns:a16="http://schemas.microsoft.com/office/drawing/2014/main" id="{0D0CFB38-1FA8-C474-F925-3C5817861585}"/>
+              </a:ext>
+            </a:extLst>
+          </p:cNvPr>
+          <p:cNvSpPr txBox="1"/>
+          <p:nvPr/>
+        </p:nvSpPr>
+        <p:spPr>
+          <a:xfrm>
+            <a:off x="2467029" y="3218632"/>
+            <a:ext cx="493533" cy="307777"/>
+          </a:xfrm>
+          <a:prstGeom prst="rect">
+            <a:avLst/>
+          </a:prstGeom>
+          <a:noFill/>
+        </p:spPr>
+        <p:txBody>
+          <a:bodyPr wrap="none" rtlCol="0">
+            <a:spAutoFit/>
+          </a:bodyPr>
+          <a:lstStyle/>
+          <a:p>
+            <a:r>
+              <a:rPr lang="en-AU" sz="1400" dirty="0"/>
+              <a:t>trait</a:t>
+            </a:r>
+          </a:p>
+        </p:txBody>
+      </p:sp>
+      <p:sp>
+        <p:nvSpPr>
+          <p:cNvPr id="17" name="TextBox 16">
+            <a:extLst>
+              <a:ext uri="{FF2B5EF4-FFF2-40B4-BE49-F238E27FC236}">
+                <a16:creationId xmlns:a16="http://schemas.microsoft.com/office/drawing/2014/main" id="{00859AEA-8903-1F2B-7A45-D96E2212D970}"/>
+              </a:ext>
+            </a:extLst>
+          </p:cNvPr>
+          <p:cNvSpPr txBox="1"/>
+          <p:nvPr/>
+        </p:nvSpPr>
+        <p:spPr>
+          <a:xfrm>
+            <a:off x="4688830" y="3213603"/>
+            <a:ext cx="377026" cy="523220"/>
+          </a:xfrm>
+          <a:prstGeom prst="rect">
+            <a:avLst/>
+          </a:prstGeom>
+          <a:noFill/>
+        </p:spPr>
+        <p:txBody>
+          <a:bodyPr wrap="none" rtlCol="0">
+            <a:spAutoFit/>
+          </a:bodyPr>
+          <a:lstStyle/>
+          <a:p>
+            <a:r>
+              <a:rPr lang="en-AU" sz="2800" dirty="0"/>
+              <a:t>×</a:t>
+            </a:r>
+          </a:p>
+        </p:txBody>
+      </p:sp>
+      <p:graphicFrame>
+        <p:nvGraphicFramePr>
+          <p:cNvPr id="18" name="Table 17">
+            <a:extLst>
+              <a:ext uri="{FF2B5EF4-FFF2-40B4-BE49-F238E27FC236}">
+                <a16:creationId xmlns:a16="http://schemas.microsoft.com/office/drawing/2014/main" id="{C5FB94FC-652E-DEF4-F084-C0E18281AAC5}"/>
+              </a:ext>
+            </a:extLst>
+          </p:cNvPr>
+          <p:cNvGraphicFramePr>
+            <a:graphicFrameLocks noGrp="1"/>
+          </p:cNvGraphicFramePr>
+          <p:nvPr>
+            <p:extLst>
+              <p:ext uri="{D42A27DB-BD31-4B8C-83A1-F6EECF244321}">
+                <p14:modId xmlns:p14="http://schemas.microsoft.com/office/powerpoint/2010/main" val="1126747757"/>
+              </p:ext>
+            </p:extLst>
+          </p:nvPr>
+        </p:nvGraphicFramePr>
+        <p:xfrm>
+          <a:off x="4338889" y="4646322"/>
+          <a:ext cx="1584000" cy="1424583"/>
+        </p:xfrm>
+        <a:graphic>
+          <a:graphicData uri="http://schemas.openxmlformats.org/drawingml/2006/table">
+            <a:tbl>
+              <a:tblPr firstRow="1" bandRow="1">
+                <a:tableStyleId>{5C22544A-7EE6-4342-B048-85BDC9FD1C3A}</a:tableStyleId>
+              </a:tblPr>
+              <a:tblGrid>
+                <a:gridCol w="262962">
+                  <a:extLst>
+                    <a:ext uri="{9D8B030D-6E8A-4147-A177-3AD203B41FA5}">
+                      <a16:colId xmlns:a16="http://schemas.microsoft.com/office/drawing/2014/main" val="3371057381"/>
+                    </a:ext>
+                  </a:extLst>
+                </a:gridCol>
+                <a:gridCol w="440346">
+                  <a:extLst>
+                    <a:ext uri="{9D8B030D-6E8A-4147-A177-3AD203B41FA5}">
+                      <a16:colId xmlns:a16="http://schemas.microsoft.com/office/drawing/2014/main" val="1907105386"/>
+                    </a:ext>
+                  </a:extLst>
+                </a:gridCol>
+                <a:gridCol w="440346">
+                  <a:extLst>
+                    <a:ext uri="{9D8B030D-6E8A-4147-A177-3AD203B41FA5}">
+                      <a16:colId xmlns:a16="http://schemas.microsoft.com/office/drawing/2014/main" val="2752765291"/>
+                    </a:ext>
+                  </a:extLst>
+                </a:gridCol>
+                <a:gridCol w="440346">
+                  <a:extLst>
+                    <a:ext uri="{9D8B030D-6E8A-4147-A177-3AD203B41FA5}">
+                      <a16:colId xmlns:a16="http://schemas.microsoft.com/office/drawing/2014/main" val="2927904193"/>
+                    </a:ext>
+                  </a:extLst>
+                </a:gridCol>
+              </a:tblGrid>
+              <a:tr h="296854">
+                <a:tc>
+                  <a:txBody>
+                    <a:bodyPr/>
+                    <a:lstStyle/>
+                    <a:p>
+                      <a:pPr algn="ctr"/>
+                      <a:endParaRPr lang="en-AU" sz="1400" dirty="0"/>
+                    </a:p>
+                  </a:txBody>
+                  <a:tcPr/>
+                </a:tc>
+                <a:tc>
+                  <a:txBody>
+                    <a:bodyPr/>
+                    <a:lstStyle/>
+                    <a:p>
+                      <a:pPr algn="ctr"/>
+                      <a:r>
+                        <a:rPr lang="en-AU" sz="1400" dirty="0"/>
+                        <a:t>a</a:t>
+                      </a:r>
+                    </a:p>
+                  </a:txBody>
+                  <a:tcPr/>
+                </a:tc>
+                <a:tc>
+                  <a:txBody>
+                    <a:bodyPr/>
+                    <a:lstStyle/>
+                    <a:p>
+                      <a:pPr algn="ctr"/>
+                      <a:r>
+                        <a:rPr lang="en-AU" sz="1400" dirty="0"/>
+                        <a:t>b</a:t>
+                      </a:r>
+                    </a:p>
+                  </a:txBody>
+                  <a:tcPr/>
+                </a:tc>
+                <a:tc>
+                  <a:txBody>
+                    <a:bodyPr/>
+                    <a:lstStyle/>
+                    <a:p>
+                      <a:pPr algn="ctr"/>
+                      <a:r>
+                        <a:rPr lang="en-AU" sz="1400" dirty="0"/>
+                        <a:t>c</a:t>
+                      </a:r>
+                    </a:p>
+                  </a:txBody>
+                  <a:tcPr/>
+                </a:tc>
+                <a:extLst>
+                  <a:ext uri="{0D108BD9-81ED-4DB2-BD59-A6C34878D82A}">
+                    <a16:rowId xmlns:a16="http://schemas.microsoft.com/office/drawing/2014/main" val="4058072949"/>
+                  </a:ext>
+                </a:extLst>
+              </a:tr>
+              <a:tr h="373261">
+                <a:tc>
+                  <a:txBody>
+                    <a:bodyPr/>
+                    <a:lstStyle/>
+                    <a:p>
+                      <a:pPr algn="ctr"/>
+                      <a:r>
+                        <a:rPr lang="en-AU" sz="1400" dirty="0">
+                          <a:solidFill>
+                            <a:schemeClr val="bg1"/>
+                          </a:solidFill>
+                        </a:rPr>
+                        <a:t>A</a:t>
+                      </a:r>
+                    </a:p>
+                  </a:txBody>
+                  <a:tcPr>
+                    <a:solidFill>
+                      <a:schemeClr val="accent1"/>
+                    </a:solidFill>
+                  </a:tcPr>
+                </a:tc>
+                <a:tc>
+                  <a:txBody>
+                    <a:bodyPr/>
+                    <a:lstStyle/>
+                    <a:p>
+                      <a:pPr algn="ctr"/>
+                      <a:r>
+                        <a:rPr lang="en-AU" sz="1400" dirty="0"/>
+                        <a:t>1</a:t>
+                      </a:r>
+                    </a:p>
+                  </a:txBody>
+                  <a:tcPr/>
+                </a:tc>
+                <a:tc>
+                  <a:txBody>
+                    <a:bodyPr/>
+                    <a:lstStyle/>
+                    <a:p>
+                      <a:pPr algn="ctr"/>
+                      <a:r>
+                        <a:rPr lang="en-AU" sz="1400" dirty="0"/>
+                        <a:t>0</a:t>
+                      </a:r>
+                    </a:p>
+                  </a:txBody>
+                  <a:tcPr/>
+                </a:tc>
+                <a:tc>
+                  <a:txBody>
+                    <a:bodyPr/>
+                    <a:lstStyle/>
+                    <a:p>
+                      <a:pPr algn="ctr"/>
+                      <a:r>
+                        <a:rPr lang="en-AU" sz="1400" dirty="0"/>
+                        <a:t>1</a:t>
+                      </a:r>
+                    </a:p>
+                  </a:txBody>
+                  <a:tcPr/>
+                </a:tc>
+                <a:extLst>
+                  <a:ext uri="{0D108BD9-81ED-4DB2-BD59-A6C34878D82A}">
+                    <a16:rowId xmlns:a16="http://schemas.microsoft.com/office/drawing/2014/main" val="181400494"/>
+                  </a:ext>
+                </a:extLst>
+              </a:tr>
+              <a:tr h="373261">
+                <a:tc>
+                  <a:txBody>
+                    <a:bodyPr/>
+                    <a:lstStyle/>
+                    <a:p>
+                      <a:pPr algn="ctr"/>
+                      <a:r>
+                        <a:rPr lang="en-AU" sz="1400" dirty="0">
+                          <a:solidFill>
+                            <a:schemeClr val="bg1"/>
+                          </a:solidFill>
+                        </a:rPr>
+                        <a:t>B</a:t>
+                      </a:r>
+                    </a:p>
+                  </a:txBody>
+                  <a:tcPr>
+                    <a:solidFill>
+                      <a:schemeClr val="accent1"/>
+                    </a:solidFill>
+                  </a:tcPr>
+                </a:tc>
+                <a:tc>
+                  <a:txBody>
+                    <a:bodyPr/>
+                    <a:lstStyle/>
+                    <a:p>
+                      <a:pPr algn="ctr"/>
+                      <a:r>
+                        <a:rPr lang="en-AU" sz="1400" dirty="0"/>
+                        <a:t>0.3</a:t>
+                      </a:r>
+                    </a:p>
+                  </a:txBody>
+                  <a:tcPr/>
+                </a:tc>
+                <a:tc>
+                  <a:txBody>
+                    <a:bodyPr/>
+                    <a:lstStyle/>
+                    <a:p>
+                      <a:pPr algn="ctr"/>
+                      <a:r>
+                        <a:rPr lang="en-AU" sz="1400" dirty="0"/>
+                        <a:t>0.6</a:t>
+                      </a:r>
+                    </a:p>
+                  </a:txBody>
+                  <a:tcPr/>
+                </a:tc>
+                <a:tc>
+                  <a:txBody>
+                    <a:bodyPr/>
+                    <a:lstStyle/>
+                    <a:p>
+                      <a:pPr algn="ctr"/>
+                      <a:r>
+                        <a:rPr lang="en-AU" sz="1400" dirty="0"/>
+                        <a:t>0.2</a:t>
+                      </a:r>
+                    </a:p>
+                  </a:txBody>
+                  <a:tcPr/>
+                </a:tc>
+                <a:extLst>
+                  <a:ext uri="{0D108BD9-81ED-4DB2-BD59-A6C34878D82A}">
+                    <a16:rowId xmlns:a16="http://schemas.microsoft.com/office/drawing/2014/main" val="3219765604"/>
+                  </a:ext>
+                </a:extLst>
+              </a:tr>
+              <a:tr h="373261">
+                <a:tc>
+                  <a:txBody>
+                    <a:bodyPr/>
+                    <a:lstStyle/>
+                    <a:p>
+                      <a:pPr algn="ctr"/>
+                      <a:r>
+                        <a:rPr lang="en-AU" sz="1400" dirty="0">
+                          <a:solidFill>
+                            <a:schemeClr val="bg1"/>
+                          </a:solidFill>
+                        </a:rPr>
+                        <a:t>C</a:t>
+                      </a:r>
+                    </a:p>
+                  </a:txBody>
+                  <a:tcPr>
+                    <a:solidFill>
+                      <a:schemeClr val="accent1"/>
+                    </a:solidFill>
+                  </a:tcPr>
+                </a:tc>
+                <a:tc>
+                  <a:txBody>
+                    <a:bodyPr/>
+                    <a:lstStyle/>
+                    <a:p>
+                      <a:pPr algn="ctr"/>
+                      <a:r>
+                        <a:rPr lang="en-AU" sz="1400" dirty="0"/>
+                        <a:t>0</a:t>
+                      </a:r>
+                    </a:p>
+                  </a:txBody>
+                  <a:tcPr/>
+                </a:tc>
+                <a:tc>
+                  <a:txBody>
+                    <a:bodyPr/>
+                    <a:lstStyle/>
+                    <a:p>
+                      <a:pPr algn="ctr"/>
+                      <a:r>
+                        <a:rPr lang="en-AU" sz="1400" dirty="0"/>
+                        <a:t>1</a:t>
+                      </a:r>
+                    </a:p>
+                  </a:txBody>
+                  <a:tcPr/>
+                </a:tc>
+                <a:tc>
+                  <a:txBody>
+                    <a:bodyPr/>
+                    <a:lstStyle/>
+                    <a:p>
+                      <a:pPr algn="ctr"/>
+                      <a:r>
+                        <a:rPr lang="en-AU" sz="1400" dirty="0"/>
+                        <a:t>NA</a:t>
+                      </a:r>
+                    </a:p>
+                  </a:txBody>
+                  <a:tcPr/>
+                </a:tc>
+                <a:extLst>
+                  <a:ext uri="{0D108BD9-81ED-4DB2-BD59-A6C34878D82A}">
+                    <a16:rowId xmlns:a16="http://schemas.microsoft.com/office/drawing/2014/main" val="2371759891"/>
+                  </a:ext>
+                </a:extLst>
+              </a:tr>
+            </a:tbl>
+          </a:graphicData>
+        </a:graphic>
+      </p:graphicFrame>
+      <p:sp>
+        <p:nvSpPr>
+          <p:cNvPr id="19" name="TextBox 18">
+            <a:extLst>
+              <a:ext uri="{FF2B5EF4-FFF2-40B4-BE49-F238E27FC236}">
+                <a16:creationId xmlns:a16="http://schemas.microsoft.com/office/drawing/2014/main" id="{04A64C07-BBF0-D3AE-FA47-8E451BBFB9AE}"/>
+              </a:ext>
+            </a:extLst>
+          </p:cNvPr>
+          <p:cNvSpPr txBox="1"/>
+          <p:nvPr/>
+        </p:nvSpPr>
+        <p:spPr>
+          <a:xfrm>
+            <a:off x="4542095" y="4338545"/>
+            <a:ext cx="811184" cy="307777"/>
+          </a:xfrm>
+          <a:prstGeom prst="rect">
+            <a:avLst/>
+          </a:prstGeom>
+          <a:noFill/>
+        </p:spPr>
+        <p:txBody>
+          <a:bodyPr wrap="none" rtlCol="0">
+            <a:spAutoFit/>
+          </a:bodyPr>
+          <a:lstStyle/>
+          <a:p>
+            <a:r>
+              <a:rPr lang="en-AU" sz="1400" dirty="0"/>
+              <a:t>stressor</a:t>
+            </a:r>
+          </a:p>
+        </p:txBody>
+      </p:sp>
+      <p:sp>
+        <p:nvSpPr>
+          <p:cNvPr id="20" name="TextBox 19">
+            <a:extLst>
+              <a:ext uri="{FF2B5EF4-FFF2-40B4-BE49-F238E27FC236}">
+                <a16:creationId xmlns:a16="http://schemas.microsoft.com/office/drawing/2014/main" id="{CE7436D3-8DCC-5EAE-1F82-60C7873DBD50}"/>
+              </a:ext>
+            </a:extLst>
+          </p:cNvPr>
+          <p:cNvSpPr txBox="1"/>
+          <p:nvPr/>
+        </p:nvSpPr>
+        <p:spPr>
+          <a:xfrm>
+            <a:off x="3553096" y="5222992"/>
+            <a:ext cx="785793" cy="307777"/>
+          </a:xfrm>
+          <a:prstGeom prst="rect">
+            <a:avLst/>
+          </a:prstGeom>
+          <a:noFill/>
+        </p:spPr>
+        <p:txBody>
+          <a:bodyPr wrap="none" rtlCol="0">
+            <a:spAutoFit/>
+          </a:bodyPr>
+          <a:lstStyle/>
+          <a:p>
+            <a:r>
+              <a:rPr lang="en-AU" sz="1400" dirty="0"/>
+              <a:t>species</a:t>
+            </a:r>
+          </a:p>
+        </p:txBody>
+      </p:sp>
+      <p:grpSp>
+        <p:nvGrpSpPr>
+          <p:cNvPr id="23" name="Group 22">
+            <a:extLst>
+              <a:ext uri="{FF2B5EF4-FFF2-40B4-BE49-F238E27FC236}">
+                <a16:creationId xmlns:a16="http://schemas.microsoft.com/office/drawing/2014/main" id="{51FA676F-B2A6-8350-4AB3-5CC680E711D9}"/>
+              </a:ext>
+            </a:extLst>
+          </p:cNvPr>
+          <p:cNvGrpSpPr/>
+          <p:nvPr/>
+        </p:nvGrpSpPr>
+        <p:grpSpPr>
+          <a:xfrm rot="16200000" flipH="1">
+            <a:off x="-742793" y="3313108"/>
+            <a:ext cx="5851580" cy="523220"/>
+            <a:chOff x="2034676" y="4097934"/>
+            <a:chExt cx="6084092" cy="523220"/>
+          </a:xfrm>
+        </p:grpSpPr>
+        <p:sp>
+          <p:nvSpPr>
+            <p:cNvPr id="24" name="Freeform: Shape 23">
+              <a:extLst>
+                <a:ext uri="{FF2B5EF4-FFF2-40B4-BE49-F238E27FC236}">
+                  <a16:creationId xmlns:a16="http://schemas.microsoft.com/office/drawing/2014/main" id="{396EF09D-BEF5-0D44-75E6-24E29AC4E3D1}"/>
+                </a:ext>
+              </a:extLst>
+            </p:cNvPr>
+            <p:cNvSpPr/>
+            <p:nvPr/>
+          </p:nvSpPr>
+          <p:spPr>
+            <a:xfrm>
+              <a:off x="2034676" y="4097934"/>
+              <a:ext cx="2340035" cy="523220"/>
+            </a:xfrm>
+            <a:custGeom>
+              <a:avLst/>
+              <a:gdLst>
+                <a:gd name="connsiteX0" fmla="*/ 0 w 2340035"/>
+                <a:gd name="connsiteY0" fmla="*/ 0 h 523220"/>
+                <a:gd name="connsiteX1" fmla="*/ 2078425 w 2340035"/>
+                <a:gd name="connsiteY1" fmla="*/ 0 h 523220"/>
+                <a:gd name="connsiteX2" fmla="*/ 2340035 w 2340035"/>
+                <a:gd name="connsiteY2" fmla="*/ 261610 h 523220"/>
+                <a:gd name="connsiteX3" fmla="*/ 2078425 w 2340035"/>
+                <a:gd name="connsiteY3" fmla="*/ 523220 h 523220"/>
+                <a:gd name="connsiteX4" fmla="*/ 0 w 2340035"/>
+                <a:gd name="connsiteY4" fmla="*/ 523220 h 523220"/>
+                <a:gd name="connsiteX5" fmla="*/ 0 w 2340035"/>
+                <a:gd name="connsiteY5" fmla="*/ 0 h 523220"/>
+              </a:gdLst>
+              <a:ahLst/>
+              <a:cxnLst>
+                <a:cxn ang="0">
+                  <a:pos x="connsiteX0" y="connsiteY0"/>
+                </a:cxn>
+                <a:cxn ang="0">
+                  <a:pos x="connsiteX1" y="connsiteY1"/>
+                </a:cxn>
+                <a:cxn ang="0">
+                  <a:pos x="connsiteX2" y="connsiteY2"/>
+                </a:cxn>
+                <a:cxn ang="0">
+                  <a:pos x="connsiteX3" y="connsiteY3"/>
+                </a:cxn>
+                <a:cxn ang="0">
+                  <a:pos x="connsiteX4" y="connsiteY4"/>
+                </a:cxn>
+                <a:cxn ang="0">
+                  <a:pos x="connsiteX5" y="connsiteY5"/>
+                </a:cxn>
+              </a:cxnLst>
+              <a:rect l="l" t="t" r="r" b="b"/>
+              <a:pathLst>
+                <a:path w="2340035" h="523220">
+                  <a:moveTo>
+                    <a:pt x="0" y="0"/>
+                  </a:moveTo>
+                  <a:lnTo>
+                    <a:pt x="2078425" y="0"/>
+                  </a:lnTo>
+                  <a:lnTo>
+                    <a:pt x="2340035" y="261610"/>
+                  </a:lnTo>
+                  <a:lnTo>
+                    <a:pt x="2078425" y="523220"/>
+                  </a:lnTo>
+                  <a:lnTo>
+                    <a:pt x="0" y="523220"/>
+                  </a:lnTo>
+                  <a:lnTo>
+                    <a:pt x="0" y="0"/>
+                  </a:lnTo>
+                  <a:close/>
+                </a:path>
+              </a:pathLst>
+            </a:custGeom>
+          </p:spPr>
+          <p:style>
+            <a:lnRef idx="2">
+              <a:schemeClr val="lt1">
+                <a:hueOff val="0"/>
+                <a:satOff val="0"/>
+                <a:lumOff val="0"/>
+                <a:alphaOff val="0"/>
+              </a:schemeClr>
+            </a:lnRef>
+            <a:fillRef idx="1">
+              <a:schemeClr val="accent1">
+                <a:hueOff val="0"/>
+                <a:satOff val="0"/>
+                <a:lumOff val="0"/>
+                <a:alphaOff val="0"/>
+              </a:schemeClr>
+            </a:fillRef>
+            <a:effectRef idx="0">
+              <a:schemeClr val="accent1">
+                <a:hueOff val="0"/>
+                <a:satOff val="0"/>
+                <a:lumOff val="0"/>
+                <a:alphaOff val="0"/>
+              </a:schemeClr>
+            </a:effectRef>
+            <a:fontRef idx="minor">
+              <a:schemeClr val="lt1"/>
+            </a:fontRef>
+          </p:style>
+          <p:txBody>
+            <a:bodyPr spcFirstLastPara="0" vert="horz" wrap="square" lIns="96012" tIns="48006" rIns="154808" bIns="48006" numCol="1" spcCol="1270" anchor="ctr" anchorCtr="0">
+              <a:noAutofit/>
+            </a:bodyPr>
+            <a:lstStyle/>
+            <a:p>
+              <a:pPr marL="0" lvl="0" indent="0" algn="r" defTabSz="800100">
+                <a:lnSpc>
+                  <a:spcPct val="90000"/>
+                </a:lnSpc>
+                <a:spcBef>
+                  <a:spcPct val="0"/>
+                </a:spcBef>
+                <a:spcAft>
+                  <a:spcPct val="35000"/>
+                </a:spcAft>
+                <a:buNone/>
+              </a:pPr>
+              <a:r>
+                <a:rPr lang="en-AU" sz="1800" kern="1200" dirty="0"/>
+                <a:t>Traits framework</a:t>
+              </a:r>
+            </a:p>
+          </p:txBody>
+        </p:sp>
+        <p:sp>
+          <p:nvSpPr>
+            <p:cNvPr id="25" name="Freeform: Shape 24">
+              <a:extLst>
+                <a:ext uri="{FF2B5EF4-FFF2-40B4-BE49-F238E27FC236}">
+                  <a16:creationId xmlns:a16="http://schemas.microsoft.com/office/drawing/2014/main" id="{256256DE-9C1B-03D5-D897-C8055F486794}"/>
+                </a:ext>
+              </a:extLst>
+            </p:cNvPr>
+            <p:cNvSpPr/>
+            <p:nvPr/>
+          </p:nvSpPr>
+          <p:spPr>
+            <a:xfrm>
+              <a:off x="3906704" y="4097934"/>
+              <a:ext cx="2340035" cy="523220"/>
+            </a:xfrm>
+            <a:custGeom>
+              <a:avLst/>
+              <a:gdLst>
+                <a:gd name="connsiteX0" fmla="*/ 0 w 2340035"/>
+                <a:gd name="connsiteY0" fmla="*/ 0 h 523220"/>
+                <a:gd name="connsiteX1" fmla="*/ 2078425 w 2340035"/>
+                <a:gd name="connsiteY1" fmla="*/ 0 h 523220"/>
+                <a:gd name="connsiteX2" fmla="*/ 2340035 w 2340035"/>
+                <a:gd name="connsiteY2" fmla="*/ 261610 h 523220"/>
+                <a:gd name="connsiteX3" fmla="*/ 2078425 w 2340035"/>
+                <a:gd name="connsiteY3" fmla="*/ 523220 h 523220"/>
+                <a:gd name="connsiteX4" fmla="*/ 0 w 2340035"/>
+                <a:gd name="connsiteY4" fmla="*/ 523220 h 523220"/>
+                <a:gd name="connsiteX5" fmla="*/ 261610 w 2340035"/>
+                <a:gd name="connsiteY5" fmla="*/ 261610 h 523220"/>
+                <a:gd name="connsiteX6" fmla="*/ 0 w 2340035"/>
+                <a:gd name="connsiteY6" fmla="*/ 0 h 523220"/>
+              </a:gdLst>
+              <a:ahLst/>
+              <a:cxnLst>
+                <a:cxn ang="0">
+                  <a:pos x="connsiteX0" y="connsiteY0"/>
+                </a:cxn>
+                <a:cxn ang="0">
+                  <a:pos x="connsiteX1" y="connsiteY1"/>
+                </a:cxn>
+                <a:cxn ang="0">
+                  <a:pos x="connsiteX2" y="connsiteY2"/>
+                </a:cxn>
+                <a:cxn ang="0">
+                  <a:pos x="connsiteX3" y="connsiteY3"/>
+                </a:cxn>
+                <a:cxn ang="0">
+                  <a:pos x="connsiteX4" y="connsiteY4"/>
+                </a:cxn>
+                <a:cxn ang="0">
+                  <a:pos x="connsiteX5" y="connsiteY5"/>
+                </a:cxn>
+                <a:cxn ang="0">
+                  <a:pos x="connsiteX6" y="connsiteY6"/>
+                </a:cxn>
+              </a:cxnLst>
+              <a:rect l="l" t="t" r="r" b="b"/>
+              <a:pathLst>
+                <a:path w="2340035" h="523220">
+                  <a:moveTo>
+                    <a:pt x="0" y="0"/>
+                  </a:moveTo>
+                  <a:lnTo>
+                    <a:pt x="2078425" y="0"/>
+                  </a:lnTo>
+                  <a:lnTo>
+                    <a:pt x="2340035" y="261610"/>
+                  </a:lnTo>
+                  <a:lnTo>
+                    <a:pt x="2078425" y="523220"/>
+                  </a:lnTo>
+                  <a:lnTo>
+                    <a:pt x="0" y="523220"/>
+                  </a:lnTo>
+                  <a:lnTo>
+                    <a:pt x="261610" y="261610"/>
+                  </a:lnTo>
+                  <a:lnTo>
+                    <a:pt x="0" y="0"/>
+                  </a:lnTo>
+                  <a:close/>
+                </a:path>
+              </a:pathLst>
+            </a:custGeom>
+          </p:spPr>
+          <p:style>
+            <a:lnRef idx="2">
+              <a:schemeClr val="lt1">
+                <a:hueOff val="0"/>
+                <a:satOff val="0"/>
+                <a:lumOff val="0"/>
+                <a:alphaOff val="0"/>
+              </a:schemeClr>
+            </a:lnRef>
+            <a:fillRef idx="1">
+              <a:schemeClr val="accent1">
+                <a:hueOff val="0"/>
+                <a:satOff val="0"/>
+                <a:lumOff val="0"/>
+                <a:alphaOff val="0"/>
+              </a:schemeClr>
+            </a:fillRef>
+            <a:effectRef idx="0">
+              <a:schemeClr val="accent1">
+                <a:hueOff val="0"/>
+                <a:satOff val="0"/>
+                <a:lumOff val="0"/>
+                <a:alphaOff val="0"/>
+              </a:schemeClr>
+            </a:effectRef>
+            <a:fontRef idx="minor">
+              <a:schemeClr val="lt1"/>
+            </a:fontRef>
+          </p:style>
+          <p:txBody>
+            <a:bodyPr spcFirstLastPara="0" vert="horz" wrap="square" lIns="333619" tIns="48006" rIns="285613" bIns="48006" numCol="1" spcCol="1270" anchor="ctr" anchorCtr="0">
+              <a:noAutofit/>
+            </a:bodyPr>
+            <a:lstStyle/>
+            <a:p>
+              <a:pPr marL="0" lvl="0" indent="0" algn="ctr" defTabSz="800100">
+                <a:lnSpc>
+                  <a:spcPct val="90000"/>
+                </a:lnSpc>
+                <a:spcBef>
+                  <a:spcPct val="0"/>
+                </a:spcBef>
+                <a:spcAft>
+                  <a:spcPct val="35000"/>
+                </a:spcAft>
+                <a:buNone/>
+              </a:pPr>
+              <a:r>
+                <a:rPr lang="en-AU" sz="1800" kern="1200" dirty="0"/>
+                <a:t>Matrices</a:t>
+              </a:r>
+            </a:p>
+          </p:txBody>
+        </p:sp>
+        <p:sp>
+          <p:nvSpPr>
+            <p:cNvPr id="26" name="Freeform: Shape 25">
+              <a:extLst>
+                <a:ext uri="{FF2B5EF4-FFF2-40B4-BE49-F238E27FC236}">
+                  <a16:creationId xmlns:a16="http://schemas.microsoft.com/office/drawing/2014/main" id="{4B23CDBD-8152-81C3-8704-CF69FDC6FD3B}"/>
+                </a:ext>
+              </a:extLst>
+            </p:cNvPr>
+            <p:cNvSpPr/>
+            <p:nvPr/>
+          </p:nvSpPr>
+          <p:spPr>
+            <a:xfrm>
+              <a:off x="5778733" y="4097934"/>
+              <a:ext cx="2340035" cy="523220"/>
+            </a:xfrm>
+            <a:custGeom>
+              <a:avLst/>
+              <a:gdLst>
+                <a:gd name="connsiteX0" fmla="*/ 0 w 2340035"/>
+                <a:gd name="connsiteY0" fmla="*/ 0 h 523220"/>
+                <a:gd name="connsiteX1" fmla="*/ 2078425 w 2340035"/>
+                <a:gd name="connsiteY1" fmla="*/ 0 h 523220"/>
+                <a:gd name="connsiteX2" fmla="*/ 2340035 w 2340035"/>
+                <a:gd name="connsiteY2" fmla="*/ 261610 h 523220"/>
+                <a:gd name="connsiteX3" fmla="*/ 2078425 w 2340035"/>
+                <a:gd name="connsiteY3" fmla="*/ 523220 h 523220"/>
+                <a:gd name="connsiteX4" fmla="*/ 0 w 2340035"/>
+                <a:gd name="connsiteY4" fmla="*/ 523220 h 523220"/>
+                <a:gd name="connsiteX5" fmla="*/ 261610 w 2340035"/>
+                <a:gd name="connsiteY5" fmla="*/ 261610 h 523220"/>
+                <a:gd name="connsiteX6" fmla="*/ 0 w 2340035"/>
+                <a:gd name="connsiteY6" fmla="*/ 0 h 523220"/>
+              </a:gdLst>
+              <a:ahLst/>
+              <a:cxnLst>
+                <a:cxn ang="0">
+                  <a:pos x="connsiteX0" y="connsiteY0"/>
+                </a:cxn>
+                <a:cxn ang="0">
+                  <a:pos x="connsiteX1" y="connsiteY1"/>
+                </a:cxn>
+                <a:cxn ang="0">
+                  <a:pos x="connsiteX2" y="connsiteY2"/>
+                </a:cxn>
+                <a:cxn ang="0">
+                  <a:pos x="connsiteX3" y="connsiteY3"/>
+                </a:cxn>
+                <a:cxn ang="0">
+                  <a:pos x="connsiteX4" y="connsiteY4"/>
+                </a:cxn>
+                <a:cxn ang="0">
+                  <a:pos x="connsiteX5" y="connsiteY5"/>
+                </a:cxn>
+                <a:cxn ang="0">
+                  <a:pos x="connsiteX6" y="connsiteY6"/>
+                </a:cxn>
+              </a:cxnLst>
+              <a:rect l="l" t="t" r="r" b="b"/>
+              <a:pathLst>
+                <a:path w="2340035" h="523220">
+                  <a:moveTo>
+                    <a:pt x="0" y="0"/>
+                  </a:moveTo>
+                  <a:lnTo>
+                    <a:pt x="2078425" y="0"/>
+                  </a:lnTo>
+                  <a:lnTo>
+                    <a:pt x="2340035" y="261610"/>
+                  </a:lnTo>
+                  <a:lnTo>
+                    <a:pt x="2078425" y="523220"/>
+                  </a:lnTo>
+                  <a:lnTo>
+                    <a:pt x="0" y="523220"/>
+                  </a:lnTo>
+                  <a:lnTo>
+                    <a:pt x="261610" y="261610"/>
+                  </a:lnTo>
+                  <a:lnTo>
+                    <a:pt x="0" y="0"/>
+                  </a:lnTo>
+                  <a:close/>
+                </a:path>
+              </a:pathLst>
+            </a:custGeom>
+          </p:spPr>
+          <p:style>
+            <a:lnRef idx="2">
+              <a:schemeClr val="lt1">
+                <a:hueOff val="0"/>
+                <a:satOff val="0"/>
+                <a:lumOff val="0"/>
+                <a:alphaOff val="0"/>
+              </a:schemeClr>
+            </a:lnRef>
+            <a:fillRef idx="1">
+              <a:schemeClr val="accent1">
+                <a:hueOff val="0"/>
+                <a:satOff val="0"/>
+                <a:lumOff val="0"/>
+                <a:alphaOff val="0"/>
+              </a:schemeClr>
+            </a:fillRef>
+            <a:effectRef idx="0">
+              <a:schemeClr val="accent1">
+                <a:hueOff val="0"/>
+                <a:satOff val="0"/>
+                <a:lumOff val="0"/>
+                <a:alphaOff val="0"/>
+              </a:schemeClr>
+            </a:effectRef>
+            <a:fontRef idx="minor">
+              <a:schemeClr val="lt1"/>
+            </a:fontRef>
+          </p:style>
+          <p:txBody>
+            <a:bodyPr spcFirstLastPara="0" vert="horz" wrap="square" lIns="333619" tIns="48006" rIns="285613" bIns="48006" numCol="1" spcCol="1270" anchor="ctr" anchorCtr="0">
+              <a:noAutofit/>
+            </a:bodyPr>
+            <a:lstStyle/>
+            <a:p>
+              <a:pPr marL="0" lvl="0" indent="0" algn="ctr" defTabSz="800100">
+                <a:lnSpc>
+                  <a:spcPct val="90000"/>
+                </a:lnSpc>
+                <a:spcBef>
+                  <a:spcPct val="0"/>
+                </a:spcBef>
+                <a:spcAft>
+                  <a:spcPct val="35000"/>
+                </a:spcAft>
+                <a:buNone/>
+              </a:pPr>
+              <a:r>
+                <a:rPr lang="en-AU" sz="1800" kern="1200" dirty="0"/>
+                <a:t>Exposure score</a:t>
+              </a:r>
+            </a:p>
+          </p:txBody>
+        </p:sp>
+      </p:grpSp>
+      <p:sp>
+        <p:nvSpPr>
+          <p:cNvPr id="41" name="Arrow: Circular 40">
+            <a:extLst>
+              <a:ext uri="{FF2B5EF4-FFF2-40B4-BE49-F238E27FC236}">
+                <a16:creationId xmlns:a16="http://schemas.microsoft.com/office/drawing/2014/main" id="{41241DAF-A5ED-8DFC-2318-5A84D043F507}"/>
+              </a:ext>
+            </a:extLst>
+          </p:cNvPr>
+          <p:cNvSpPr/>
+          <p:nvPr/>
+        </p:nvSpPr>
+        <p:spPr>
+          <a:xfrm rot="6187903">
+            <a:off x="5627192" y="3824637"/>
+            <a:ext cx="1292999" cy="1252880"/>
+          </a:xfrm>
+          <a:prstGeom prst="circularArrow">
+            <a:avLst>
+              <a:gd name="adj1" fmla="val 6314"/>
+              <a:gd name="adj2" fmla="val 904143"/>
+              <a:gd name="adj3" fmla="val 20895230"/>
+              <a:gd name="adj4" fmla="val 13977503"/>
+              <a:gd name="adj5" fmla="val 11286"/>
+            </a:avLst>
+          </a:prstGeom>
+          <a:ln>
+            <a:noFill/>
+          </a:ln>
+        </p:spPr>
+        <p:style>
+          <a:lnRef idx="2">
+            <a:schemeClr val="accent1">
+              <a:shade val="15000"/>
+            </a:schemeClr>
+          </a:lnRef>
+          <a:fillRef idx="1">
+            <a:schemeClr val="accent1"/>
+          </a:fillRef>
+          <a:effectRef idx="0">
+            <a:schemeClr val="accent1"/>
+          </a:effectRef>
+          <a:fontRef idx="minor">
+            <a:schemeClr val="lt1"/>
+          </a:fontRef>
+        </p:style>
+        <p:txBody>
+          <a:bodyPr rtlCol="0" anchor="ctr"/>
+          <a:lstStyle/>
+          <a:p>
+            <a:pPr algn="ctr"/>
+            <a:endParaRPr lang="en-AU">
+              <a:solidFill>
+                <a:schemeClr val="tx1"/>
+              </a:solidFill>
+            </a:endParaRPr>
+          </a:p>
+        </p:txBody>
+      </p:sp>
+      <p:sp>
+        <p:nvSpPr>
+          <p:cNvPr id="42" name="TextBox 41">
+            <a:extLst>
+              <a:ext uri="{FF2B5EF4-FFF2-40B4-BE49-F238E27FC236}">
+                <a16:creationId xmlns:a16="http://schemas.microsoft.com/office/drawing/2014/main" id="{223B4C48-620B-013B-C6B0-008D04CD49E2}"/>
+              </a:ext>
+            </a:extLst>
+          </p:cNvPr>
+          <p:cNvSpPr txBox="1"/>
+          <p:nvPr/>
+        </p:nvSpPr>
+        <p:spPr>
+          <a:xfrm>
+            <a:off x="6269113" y="4941419"/>
+            <a:ext cx="1163652" cy="323165"/>
+          </a:xfrm>
+          <a:prstGeom prst="rect">
+            <a:avLst/>
+          </a:prstGeom>
+          <a:noFill/>
+        </p:spPr>
+        <p:txBody>
+          <a:bodyPr wrap="none" rtlCol="0">
+            <a:spAutoFit/>
+          </a:bodyPr>
+          <a:lstStyle/>
+          <a:p>
+            <a:r>
+              <a:rPr lang="en-AU" sz="1500" dirty="0"/>
+              <a:t>Aggregation</a:t>
+            </a:r>
+          </a:p>
+        </p:txBody>
+      </p:sp>
+    </p:spTree>
+    <p:extLst>
+      <p:ext uri="{BB962C8B-B14F-4D97-AF65-F5344CB8AC3E}">
+        <p14:creationId xmlns:p14="http://schemas.microsoft.com/office/powerpoint/2010/main" val="2277914510"/>
+      </p:ext>
+    </p:extLst>
+  </p:cSld>
+  <p:clrMapOvr>
+    <a:masterClrMapping/>
+  </p:clrMapOvr>
+</p:sld>
+</file>
+
 <file path=ppt/theme/theme1.xml><?xml version="1.0" encoding="utf-8"?>
 <a:theme xmlns:a="http://schemas.openxmlformats.org/drawingml/2006/main" name="Office Theme">
   <a:themeElements>
